--- a/docs/DayReminders-Overview.pptx
+++ b/docs/DayReminders-Overview.pptx
@@ -3452,7 +3452,7 @@
       </p:sp>
       <p:pic>
         <p:nvPicPr>
-          <p:cNvPr id="4" name="Picture 3" descr="image.png"/>
+          <p:cNvPr id="4" name="Picture 3" descr="01-left-rail.png"/>
           <p:cNvPicPr>
             <a:picLocks noChangeAspect="1"/>
           </p:cNvPicPr>
@@ -3731,7 +3731,7 @@
       </p:sp>
       <p:pic>
         <p:nvPicPr>
-          <p:cNvPr id="4" name="Picture 3" descr="image.png"/>
+          <p:cNvPr id="4" name="Picture 3" descr="02-add-form.png"/>
           <p:cNvPicPr>
             <a:picLocks noChangeAspect="1"/>
           </p:cNvPicPr>
@@ -4355,7 +4355,7 @@
       </p:sp>
       <p:pic>
         <p:nvPicPr>
-          <p:cNvPr id="4" name="Picture 3" descr="image.png"/>
+          <p:cNvPr id="4" name="Picture 3" descr="03-lines-view.png"/>
           <p:cNvPicPr>
             <a:picLocks noChangeAspect="1"/>
           </p:cNvPicPr>
@@ -4641,7 +4641,7 @@
       </p:sp>
       <p:pic>
         <p:nvPicPr>
-          <p:cNvPr id="4" name="Picture 3" descr="image.png"/>
+          <p:cNvPr id="4" name="Picture 3" descr="04-week-view.png"/>
           <p:cNvPicPr>
             <a:picLocks noChangeAspect="1"/>
           </p:cNvPicPr>
@@ -4962,7 +4962,7 @@
       </p:sp>
       <p:pic>
         <p:nvPicPr>
-          <p:cNvPr id="4" name="Picture 3" descr="image.png"/>
+          <p:cNvPr id="4" name="Picture 3" descr="05-group-by-client.png"/>
           <p:cNvPicPr>
             <a:picLocks noChangeAspect="1"/>
           </p:cNvPicPr>
@@ -5302,7 +5302,7 @@
       </p:sp>
       <p:pic>
         <p:nvPicPr>
-          <p:cNvPr id="4" name="Picture 3" descr="image.png"/>
+          <p:cNvPr id="4" name="Picture 3" descr="06-proactive-card.png"/>
           <p:cNvPicPr>
             <a:picLocks noChangeAspect="1"/>
           </p:cNvPicPr>

--- a/docs/DayReminders-Overview.pptx
+++ b/docs/DayReminders-Overview.pptx
@@ -3206,7 +3206,7 @@
               </a:defRPr>
             </a:pPr>
             <a:r>
-              <a:t>Your reminders, inside Teams.</a:t>
+              <a:t>Reminders, in the place you already work.</a:t>
             </a:r>
           </a:p>
         </p:txBody>
@@ -3313,7 +3313,7 @@
               </a:defRPr>
             </a:pPr>
             <a:r>
-              <a:t>What is Day Reminders?</a:t>
+              <a:t>What it is</a:t>
             </a:r>
           </a:p>
         </p:txBody>
@@ -3326,8 +3326,8 @@
         </p:nvSpPr>
         <p:spPr>
           <a:xfrm>
-            <a:off x="548640" y="1188720"/>
-            <a:ext cx="5669280" cy="5029200"/>
+            <a:off x="457200" y="1188720"/>
+            <a:ext cx="4846320" cy="5029200"/>
           </a:xfrm>
           <a:prstGeom prst="rect">
             <a:avLst/>
@@ -3352,39 +3352,68 @@
               </a:defRPr>
             </a:pPr>
             <a:r>
-              <a:t>A personal productivity tab + bot that lives inside Microsoft Teams.</a:t>
-            </a:r>
-          </a:p>
-          <a:p>
-            <a:pPr>
-              <a:spcAft>
-                <a:spcPts val="600"/>
-              </a:spcAft>
-              <a:defRPr sz="1700">
-                <a:solidFill>
-                  <a:srgbClr val="242424"/>
-                </a:solidFill>
-                <a:latin typeface="Segoe UI"/>
-              </a:defRPr>
-            </a:pPr>
-            <a:r>
-              <a:t>Capture what you need to remember today (or any day) — the bot pings you in chat before each one.</a:t>
-            </a:r>
-          </a:p>
-          <a:p>
-            <a:pPr>
-              <a:spcAft>
-                <a:spcPts val="600"/>
-              </a:spcAft>
-              <a:defRPr sz="1700">
-                <a:solidFill>
-                  <a:srgbClr val="242424"/>
-                </a:solidFill>
-                <a:latin typeface="Segoe UI"/>
-              </a:defRPr>
-            </a:pPr>
-            <a:r>
-              <a:t>No more flipping to another app.</a:t>
+              <a:t>Add what you need to remember today.</a:t>
+            </a:r>
+          </a:p>
+          <a:p>
+            <a:pPr>
+              <a:spcAft>
+                <a:spcPts val="600"/>
+              </a:spcAft>
+              <a:defRPr sz="1700">
+                <a:solidFill>
+                  <a:srgbClr val="242424"/>
+                </a:solidFill>
+                <a:latin typeface="Segoe UI"/>
+              </a:defRPr>
+            </a:pPr>
+            <a:r>
+              <a:t>The bot pings you in chat before each one.</a:t>
+            </a:r>
+          </a:p>
+          <a:p>
+            <a:pPr>
+              <a:spcAft>
+                <a:spcPts val="600"/>
+              </a:spcAft>
+              <a:defRPr sz="1700">
+                <a:solidFill>
+                  <a:srgbClr val="242424"/>
+                </a:solidFill>
+                <a:latin typeface="Segoe UI"/>
+              </a:defRPr>
+            </a:pPr>
+            <a:r>
+              <a:t>Mark it done from the card. Snooze it. Move on.</a:t>
+            </a:r>
+          </a:p>
+          <a:p>
+            <a:pPr>
+              <a:spcAft>
+                <a:spcPts val="600"/>
+              </a:spcAft>
+              <a:defRPr sz="1700">
+                <a:solidFill>
+                  <a:srgbClr val="242424"/>
+                </a:solidFill>
+                <a:latin typeface="Segoe UI"/>
+              </a:defRPr>
+            </a:pPr>
+          </a:p>
+          <a:p>
+            <a:pPr>
+              <a:spcAft>
+                <a:spcPts val="600"/>
+              </a:spcAft>
+              <a:defRPr sz="1700">
+                <a:solidFill>
+                  <a:srgbClr val="242424"/>
+                </a:solidFill>
+                <a:latin typeface="Segoe UI"/>
+              </a:defRPr>
+            </a:pPr>
+            <a:r>
+              <a:t>No flipping to a separate app — it lives where you already work.</a:t>
             </a:r>
           </a:p>
           <a:p>
@@ -3429,23 +3458,23 @@
               </a:defRPr>
             </a:pPr>
             <a:r>
-              <a:t>•  Look for the alarm-clock icon in the Teams left rail.</a:t>
-            </a:r>
-          </a:p>
-          <a:p>
-            <a:pPr>
-              <a:spcAft>
-                <a:spcPts val="600"/>
-              </a:spcAft>
-              <a:defRPr sz="1700">
-                <a:solidFill>
-                  <a:srgbClr val="242424"/>
-                </a:solidFill>
-                <a:latin typeface="Segoe UI"/>
-              </a:defRPr>
-            </a:pPr>
-            <a:r>
-              <a:t>•  Two top tabs: Reminders (the main UI) and Chat (notifications + slash commands).</a:t>
+              <a:t>•  Alarm-clock icon in your Teams left rail.</a:t>
+            </a:r>
+          </a:p>
+          <a:p>
+            <a:pPr>
+              <a:spcAft>
+                <a:spcPts val="600"/>
+              </a:spcAft>
+              <a:defRPr sz="1700">
+                <a:solidFill>
+                  <a:srgbClr val="242424"/>
+                </a:solidFill>
+                <a:latin typeface="Segoe UI"/>
+              </a:defRPr>
+            </a:pPr>
+            <a:r>
+              <a:t>•  Two top tabs: Reminders (the UI) and Chat (where the bot pings you).</a:t>
             </a:r>
           </a:p>
         </p:txBody>
@@ -3466,8 +3495,8 @@
         </p:blipFill>
         <p:spPr>
           <a:xfrm>
-            <a:off x="6583680" y="1188720"/>
-            <a:ext cx="5120640" cy="5029200"/>
+            <a:off x="5486400" y="1811807"/>
+            <a:ext cx="6245352" cy="3783026"/>
           </a:xfrm>
           <a:prstGeom prst="rect">
             <a:avLst/>
@@ -3589,8 +3618,8 @@
         </p:nvSpPr>
         <p:spPr>
           <a:xfrm>
-            <a:off x="548640" y="1188720"/>
-            <a:ext cx="5669280" cy="5029200"/>
+            <a:off x="457200" y="1188720"/>
+            <a:ext cx="4846320" cy="5029200"/>
           </a:xfrm>
           <a:prstGeom prst="rect">
             <a:avLst/>
@@ -3745,8 +3774,8 @@
         </p:blipFill>
         <p:spPr>
           <a:xfrm>
-            <a:off x="6583680" y="1188720"/>
-            <a:ext cx="5120640" cy="5029200"/>
+            <a:off x="5486400" y="1811807"/>
+            <a:ext cx="6245352" cy="3783026"/>
           </a:xfrm>
           <a:prstGeom prst="rect">
             <a:avLst/>
@@ -4168,8 +4197,8 @@
         </p:nvSpPr>
         <p:spPr>
           <a:xfrm>
-            <a:off x="548640" y="1188720"/>
-            <a:ext cx="5669280" cy="5029200"/>
+            <a:off x="457200" y="1188720"/>
+            <a:ext cx="4846320" cy="5029200"/>
           </a:xfrm>
           <a:prstGeom prst="rect">
             <a:avLst/>
@@ -4369,8 +4398,8 @@
         </p:blipFill>
         <p:spPr>
           <a:xfrm>
-            <a:off x="6583680" y="1188720"/>
-            <a:ext cx="5120640" cy="5029200"/>
+            <a:off x="5486400" y="1811807"/>
+            <a:ext cx="6245352" cy="3783026"/>
           </a:xfrm>
           <a:prstGeom prst="rect">
             <a:avLst/>
@@ -4479,7 +4508,7 @@
               </a:defRPr>
             </a:pPr>
             <a:r>
-              <a:t>Week view — your whole week at a glance</a:t>
+              <a:t>Week view — am I bombarded or free?</a:t>
             </a:r>
           </a:p>
         </p:txBody>
@@ -4492,8 +4521,8 @@
         </p:nvSpPr>
         <p:spPr>
           <a:xfrm>
-            <a:off x="548640" y="1188720"/>
-            <a:ext cx="5669280" cy="5029200"/>
+            <a:off x="457200" y="1188720"/>
+            <a:ext cx="4846320" cy="5029200"/>
           </a:xfrm>
           <a:prstGeom prst="rect">
             <a:avLst/>
@@ -4518,123 +4547,110 @@
               </a:defRPr>
             </a:pPr>
             <a:r>
-              <a:t>Mon–Sun grid of reminders by due date. Today's column highlighted.</a:t>
-            </a:r>
-          </a:p>
-          <a:p>
-            <a:pPr>
-              <a:spcAft>
-                <a:spcPts val="600"/>
-              </a:spcAft>
-              <a:defRPr sz="1700">
-                <a:solidFill>
-                  <a:srgbClr val="242424"/>
-                </a:solidFill>
-                <a:latin typeface="Segoe UI"/>
-              </a:defRPr>
-            </a:pPr>
-          </a:p>
-          <a:p>
-            <a:pPr>
-              <a:spcAft>
-                <a:spcPts val="600"/>
-              </a:spcAft>
-              <a:defRPr sz="1700">
-                <a:solidFill>
-                  <a:srgbClr val="242424"/>
-                </a:solidFill>
-                <a:latin typeface="Segoe UI"/>
-              </a:defRPr>
-            </a:pPr>
-            <a:r>
-              <a:t>Timed items stack chronologically in each day; anytime items sit at the bottom under a sub-heading.</a:t>
-            </a:r>
-          </a:p>
-          <a:p>
-            <a:pPr>
-              <a:spcAft>
-                <a:spcPts val="600"/>
-              </a:spcAft>
-              <a:defRPr sz="1700">
-                <a:solidFill>
-                  <a:srgbClr val="242424"/>
-                </a:solidFill>
-                <a:latin typeface="Segoe UI"/>
-              </a:defRPr>
-            </a:pPr>
-          </a:p>
-          <a:p>
-            <a:pPr>
-              <a:spcAft>
-                <a:spcPts val="600"/>
-              </a:spcAft>
-              <a:defRPr sz="1700">
-                <a:solidFill>
-                  <a:srgbClr val="242424"/>
-                </a:solidFill>
-                <a:latin typeface="Segoe UI"/>
-              </a:defRPr>
-            </a:pPr>
-            <a:r>
-              <a:t>Click an empty day to start adding a reminder pre-filled with that date.</a:t>
-            </a:r>
-          </a:p>
-          <a:p>
-            <a:pPr>
-              <a:spcAft>
-                <a:spcPts val="600"/>
-              </a:spcAft>
-              <a:defRPr sz="1700">
-                <a:solidFill>
-                  <a:srgbClr val="242424"/>
-                </a:solidFill>
-                <a:latin typeface="Segoe UI"/>
-              </a:defRPr>
-            </a:pPr>
-          </a:p>
-          <a:p>
-            <a:pPr>
-              <a:spcAft>
-                <a:spcPts val="600"/>
-              </a:spcAft>
-              <a:defRPr sz="1700">
-                <a:solidFill>
-                  <a:srgbClr val="242424"/>
-                </a:solidFill>
-                <a:latin typeface="Segoe UI"/>
-              </a:defRPr>
-            </a:pPr>
-            <a:r>
-              <a:t>Prev / Today / Next arrows let you navigate weeks.</a:t>
-            </a:r>
-          </a:p>
-          <a:p>
-            <a:pPr>
-              <a:spcAft>
-                <a:spcPts val="600"/>
-              </a:spcAft>
-              <a:defRPr sz="1700">
-                <a:solidFill>
-                  <a:srgbClr val="242424"/>
-                </a:solidFill>
-                <a:latin typeface="Segoe UI"/>
-              </a:defRPr>
-            </a:pPr>
-          </a:p>
-          <a:p>
-            <a:pPr>
-              <a:spcAft>
-                <a:spcPts val="600"/>
-              </a:spcAft>
-              <a:defRPr sz="1700">
-                <a:solidFill>
-                  <a:srgbClr val="242424"/>
-                </a:solidFill>
-                <a:latin typeface="Segoe UI"/>
-              </a:defRPr>
-            </a:pPr>
-            <a:r>
-              <a:t>Mini Day ⇄ Week switcher inside the header — flip without going to the top bar.</a:t>
+              <a:t>For the moment when you need to know what your whole week looks like.</a:t>
+            </a:r>
+          </a:p>
+          <a:p>
+            <a:pPr>
+              <a:spcAft>
+                <a:spcPts val="600"/>
+              </a:spcAft>
+              <a:defRPr sz="1700">
+                <a:solidFill>
+                  <a:srgbClr val="242424"/>
+                </a:solidFill>
+                <a:latin typeface="Segoe UI"/>
+              </a:defRPr>
+            </a:pPr>
+          </a:p>
+          <a:p>
+            <a:pPr>
+              <a:spcAft>
+                <a:spcPts val="600"/>
+              </a:spcAft>
+              <a:defRPr sz="1700">
+                <a:solidFill>
+                  <a:srgbClr val="242424"/>
+                </a:solidFill>
+                <a:latin typeface="Segoe UI"/>
+              </a:defRPr>
+            </a:pPr>
+            <a:r>
+              <a:t>Mon–Sun grid by due date. Today's column highlighted.</a:t>
+            </a:r>
+          </a:p>
+          <a:p>
+            <a:pPr>
+              <a:spcAft>
+                <a:spcPts val="600"/>
+              </a:spcAft>
+              <a:defRPr sz="1700">
+                <a:solidFill>
+                  <a:srgbClr val="242424"/>
+                </a:solidFill>
+                <a:latin typeface="Segoe UI"/>
+              </a:defRPr>
+            </a:pPr>
+            <a:r>
+              <a:t>Timed items stack by time within each day; anytime items at the bottom.</a:t>
+            </a:r>
+          </a:p>
+          <a:p>
+            <a:pPr>
+              <a:spcAft>
+                <a:spcPts val="600"/>
+              </a:spcAft>
+              <a:defRPr sz="1700">
+                <a:solidFill>
+                  <a:srgbClr val="242424"/>
+                </a:solidFill>
+                <a:latin typeface="Segoe UI"/>
+              </a:defRPr>
+            </a:pPr>
+          </a:p>
+          <a:p>
+            <a:pPr>
+              <a:spcAft>
+                <a:spcPts val="600"/>
+              </a:spcAft>
+              <a:defRPr sz="1700">
+                <a:solidFill>
+                  <a:srgbClr val="242424"/>
+                </a:solidFill>
+                <a:latin typeface="Segoe UI"/>
+              </a:defRPr>
+            </a:pPr>
+            <a:r>
+              <a:t>Click any empty day to start adding a reminder for that date.</a:t>
+            </a:r>
+          </a:p>
+          <a:p>
+            <a:pPr>
+              <a:spcAft>
+                <a:spcPts val="600"/>
+              </a:spcAft>
+              <a:defRPr sz="1700">
+                <a:solidFill>
+                  <a:srgbClr val="242424"/>
+                </a:solidFill>
+                <a:latin typeface="Segoe UI"/>
+              </a:defRPr>
+            </a:pPr>
+          </a:p>
+          <a:p>
+            <a:pPr>
+              <a:spcAft>
+                <a:spcPts val="600"/>
+              </a:spcAft>
+              <a:defRPr sz="1700">
+                <a:solidFill>
+                  <a:srgbClr val="242424"/>
+                </a:solidFill>
+                <a:latin typeface="Segoe UI"/>
+              </a:defRPr>
+            </a:pPr>
+            <a:r>
+              <a:t>Prev / Today / Next to navigate weeks. Mini Day ⇄ Week switcher in the header so you don't have to go back to the top bar to flip.</a:t>
             </a:r>
           </a:p>
         </p:txBody>
@@ -4655,8 +4671,8 @@
         </p:blipFill>
         <p:spPr>
           <a:xfrm>
-            <a:off x="6583680" y="1188720"/>
-            <a:ext cx="5120640" cy="5029200"/>
+            <a:off x="5486400" y="1811807"/>
+            <a:ext cx="6245352" cy="3783026"/>
           </a:xfrm>
           <a:prstGeom prst="rect">
             <a:avLst/>
@@ -4778,8 +4794,8 @@
         </p:nvSpPr>
         <p:spPr>
           <a:xfrm>
-            <a:off x="548640" y="1188720"/>
-            <a:ext cx="5669280" cy="5029200"/>
+            <a:off x="457200" y="1188720"/>
+            <a:ext cx="4846320" cy="5029200"/>
           </a:xfrm>
           <a:prstGeom prst="rect">
             <a:avLst/>
@@ -4976,8 +4992,8 @@
         </p:blipFill>
         <p:spPr>
           <a:xfrm>
-            <a:off x="6583680" y="1188720"/>
-            <a:ext cx="5120640" cy="5029200"/>
+            <a:off x="5486400" y="1811807"/>
+            <a:ext cx="6245352" cy="3783026"/>
           </a:xfrm>
           <a:prstGeom prst="rect">
             <a:avLst/>
@@ -5099,8 +5115,8 @@
         </p:nvSpPr>
         <p:spPr>
           <a:xfrm>
-            <a:off x="548640" y="1188720"/>
-            <a:ext cx="5669280" cy="5029200"/>
+            <a:off x="457200" y="1188720"/>
+            <a:ext cx="4846320" cy="5029200"/>
           </a:xfrm>
           <a:prstGeom prst="rect">
             <a:avLst/>
@@ -5316,8 +5332,8 @@
         </p:blipFill>
         <p:spPr>
           <a:xfrm>
-            <a:off x="6583680" y="1188720"/>
-            <a:ext cx="5120640" cy="5029200"/>
+            <a:off x="5486400" y="1811807"/>
+            <a:ext cx="6245352" cy="3783026"/>
           </a:xfrm>
           <a:prstGeom prst="rect">
             <a:avLst/>
@@ -5558,7 +5574,7 @@
               </a:defRPr>
             </a:pPr>
             <a:r>
-              <a:t>•  Select multiple — top-bar button, then bulk-done / delete / star.</a:t>
+              <a:t>•  Select multiple — top-bar button, then bulk-done / delete / star a batch.</a:t>
             </a:r>
           </a:p>
           <a:p>
@@ -5590,97 +5606,97 @@
               </a:defRPr>
             </a:pPr>
             <a:r>
-              <a:t>•  Undo delete — toast appears for 5 seconds after every delete.</a:t>
-            </a:r>
-          </a:p>
-          <a:p>
-            <a:pPr>
-              <a:spcAft>
-                <a:spcPts val="600"/>
-              </a:spcAft>
-              <a:defRPr sz="1700">
-                <a:solidFill>
-                  <a:srgbClr val="242424"/>
-                </a:solidFill>
-                <a:latin typeface="Segoe UI"/>
-              </a:defRPr>
-            </a:pPr>
-            <a:r>
-              <a:t>•  Settings (top-right ⚙) — EOD time, default lead minutes, weekdays-only, theme.</a:t>
-            </a:r>
-          </a:p>
-          <a:p>
-            <a:pPr>
-              <a:spcAft>
-                <a:spcPts val="600"/>
-              </a:spcAft>
-              <a:defRPr sz="1700">
-                <a:solidFill>
-                  <a:srgbClr val="242424"/>
-                </a:solidFill>
-                <a:latin typeface="Segoe UI"/>
-              </a:defRPr>
-            </a:pPr>
-          </a:p>
-          <a:p>
-            <a:pPr>
-              <a:spcAft>
-                <a:spcPts val="600"/>
-              </a:spcAft>
-              <a:defRPr sz="1700">
-                <a:solidFill>
-                  <a:srgbClr val="242424"/>
-                </a:solidFill>
-                <a:latin typeface="Segoe UI"/>
-              </a:defRPr>
-            </a:pPr>
-            <a:r>
-              <a:t>Coming next (v1.5): sharing — assign reminders to teammates,</a:t>
-            </a:r>
-          </a:p>
-          <a:p>
-            <a:pPr>
-              <a:spcAft>
-                <a:spcPts val="600"/>
-              </a:spcAft>
-              <a:defRPr sz="1700">
-                <a:solidFill>
-                  <a:srgbClr val="242424"/>
-                </a:solidFill>
-                <a:latin typeface="Segoe UI"/>
-              </a:defRPr>
-            </a:pPr>
-            <a:r>
-              <a:t>    set per-tag default share lists (e.g. #QC = [Benex, Tim]).</a:t>
-            </a:r>
-          </a:p>
-          <a:p>
-            <a:pPr>
-              <a:spcAft>
-                <a:spcPts val="600"/>
-              </a:spcAft>
-              <a:defRPr sz="1700">
-                <a:solidFill>
-                  <a:srgbClr val="242424"/>
-                </a:solidFill>
-                <a:latin typeface="Segoe UI"/>
-              </a:defRPr>
-            </a:pPr>
-          </a:p>
-          <a:p>
-            <a:pPr>
-              <a:spcAft>
-                <a:spcPts val="600"/>
-              </a:spcAft>
-              <a:defRPr sz="1700">
-                <a:solidFill>
-                  <a:srgbClr val="242424"/>
-                </a:solidFill>
-                <a:latin typeface="Segoe UI"/>
-              </a:defRPr>
-            </a:pPr>
-            <a:r>
-              <a:t>Bugs / requests → ping Joshua, or post in the team channel.</a:t>
+              <a:t>•  Undo delete — toast hangs around for 5 seconds after every delete.</a:t>
+            </a:r>
+          </a:p>
+          <a:p>
+            <a:pPr>
+              <a:spcAft>
+                <a:spcPts val="600"/>
+              </a:spcAft>
+              <a:defRPr sz="1700">
+                <a:solidFill>
+                  <a:srgbClr val="242424"/>
+                </a:solidFill>
+                <a:latin typeface="Segoe UI"/>
+              </a:defRPr>
+            </a:pPr>
+            <a:r>
+              <a:t>•  Settings (top-right ⚙) — EOD check-in time, default lead minutes, weekdays-only, theme.</a:t>
+            </a:r>
+          </a:p>
+          <a:p>
+            <a:pPr>
+              <a:spcAft>
+                <a:spcPts val="600"/>
+              </a:spcAft>
+              <a:defRPr sz="1700">
+                <a:solidFill>
+                  <a:srgbClr val="242424"/>
+                </a:solidFill>
+                <a:latin typeface="Segoe UI"/>
+              </a:defRPr>
+            </a:pPr>
+          </a:p>
+          <a:p>
+            <a:pPr>
+              <a:spcAft>
+                <a:spcPts val="600"/>
+              </a:spcAft>
+              <a:defRPr sz="1700">
+                <a:solidFill>
+                  <a:srgbClr val="242424"/>
+                </a:solidFill>
+                <a:latin typeface="Segoe UI"/>
+              </a:defRPr>
+            </a:pPr>
+            <a:r>
+              <a:t>Coming next (v1.5): sharing. Assign reminders to teammates; set per-tag default share lists</a:t>
+            </a:r>
+          </a:p>
+          <a:p>
+            <a:pPr>
+              <a:spcAft>
+                <a:spcPts val="600"/>
+              </a:spcAft>
+              <a:defRPr sz="1700">
+                <a:solidFill>
+                  <a:srgbClr val="242424"/>
+                </a:solidFill>
+                <a:latin typeface="Segoe UI"/>
+              </a:defRPr>
+            </a:pPr>
+            <a:r>
+              <a:t>    so #QC auto-shares with the QC team without picking recipients each time.</a:t>
+            </a:r>
+          </a:p>
+          <a:p>
+            <a:pPr>
+              <a:spcAft>
+                <a:spcPts val="600"/>
+              </a:spcAft>
+              <a:defRPr sz="1700">
+                <a:solidFill>
+                  <a:srgbClr val="242424"/>
+                </a:solidFill>
+                <a:latin typeface="Segoe UI"/>
+              </a:defRPr>
+            </a:pPr>
+          </a:p>
+          <a:p>
+            <a:pPr>
+              <a:spcAft>
+                <a:spcPts val="600"/>
+              </a:spcAft>
+              <a:defRPr sz="1700">
+                <a:solidFill>
+                  <a:srgbClr val="242424"/>
+                </a:solidFill>
+                <a:latin typeface="Segoe UI"/>
+              </a:defRPr>
+            </a:pPr>
+            <a:r>
+              <a:t>Bugs, asks, 'this is annoying' feedback → drop them in the team channel or ping Josh.</a:t>
             </a:r>
           </a:p>
         </p:txBody>

--- a/docs/DayReminders-Overview.pptx
+++ b/docs/DayReminders-Overview.pptx
@@ -3111,7 +3111,7 @@
             <a:avLst/>
           </a:prstGeom>
           <a:solidFill>
-            <a:srgbClr val="182C3C"/>
+            <a:srgbClr val="0E1F2E"/>
           </a:solidFill>
           <a:ln>
             <a:noFill/>
@@ -3141,37 +3141,44 @@
       </p:sp>
       <p:sp>
         <p:nvSpPr>
-          <p:cNvPr id="3" name="TextBox 2"/>
-          <p:cNvSpPr txBox="1"/>
+          <p:cNvPr id="3" name="Rectangle 2"/>
+          <p:cNvSpPr/>
           <p:nvPr/>
         </p:nvSpPr>
         <p:spPr>
           <a:xfrm>
-            <a:off x="914400" y="2103120"/>
-            <a:ext cx="10058400" cy="1645920"/>
-          </a:xfrm>
-          <a:prstGeom prst="rect">
-            <a:avLst/>
-          </a:prstGeom>
-          <a:noFill/>
-        </p:spPr>
-        <p:txBody>
-          <a:bodyPr wrap="none">
-            <a:spAutoFit/>
-          </a:bodyPr>
-          <a:lstStyle/>
-          <a:p>
-            <a:pPr>
-              <a:defRPr sz="8000" b="1">
-                <a:solidFill>
-                  <a:srgbClr val="FFFFFF"/>
-                </a:solidFill>
-                <a:latin typeface="Segoe UI"/>
-              </a:defRPr>
-            </a:pPr>
-            <a:r>
-              <a:t>Day Reminders</a:t>
-            </a:r>
+            <a:off x="914400" y="1874519"/>
+            <a:ext cx="640080" cy="82296"/>
+          </a:xfrm>
+          <a:prstGeom prst="rect">
+            <a:avLst/>
+          </a:prstGeom>
+          <a:solidFill>
+            <a:srgbClr val="38AEEB"/>
+          </a:solidFill>
+          <a:ln>
+            <a:noFill/>
+          </a:ln>
+        </p:spPr>
+        <p:style>
+          <a:lnRef idx="1">
+            <a:schemeClr val="accent1"/>
+          </a:lnRef>
+          <a:fillRef idx="3">
+            <a:schemeClr val="accent1"/>
+          </a:fillRef>
+          <a:effectRef idx="2">
+            <a:schemeClr val="accent1"/>
+          </a:effectRef>
+          <a:fontRef idx="minor">
+            <a:schemeClr val="lt1"/>
+          </a:fontRef>
+        </p:style>
+        <p:txBody>
+          <a:bodyPr rtlCol="0" anchor="ctr"/>
+          <a:lstStyle/>
+          <a:p>
+            <a:pPr algn="ctr"/>
           </a:p>
         </p:txBody>
       </p:sp>
@@ -3183,8 +3190,8 @@
         </p:nvSpPr>
         <p:spPr>
           <a:xfrm>
-            <a:off x="914400" y="3566160"/>
-            <a:ext cx="10058400" cy="731520"/>
+            <a:off x="914400" y="2103120"/>
+            <a:ext cx="10332720" cy="1463040"/>
           </a:xfrm>
           <a:prstGeom prst="rect">
             <a:avLst/>
@@ -3192,21 +3199,21 @@
           <a:noFill/>
         </p:spPr>
         <p:txBody>
-          <a:bodyPr wrap="none">
+          <a:bodyPr wrap="square" anchor="t">
             <a:spAutoFit/>
           </a:bodyPr>
           <a:lstStyle/>
           <a:p>
-            <a:pPr>
-              <a:defRPr sz="3200">
-                <a:solidFill>
-                  <a:srgbClr val="38AEEB"/>
+            <a:pPr algn="l">
+              <a:defRPr sz="8400" b="1">
+                <a:solidFill>
+                  <a:srgbClr val="FFFFFF"/>
                 </a:solidFill>
                 <a:latin typeface="Segoe UI"/>
               </a:defRPr>
             </a:pPr>
             <a:r>
-              <a:t>Reminders, in the place you already work.</a:t>
+              <a:t>Day Reminders</a:t>
             </a:r>
           </a:p>
         </p:txBody>
@@ -3219,8 +3226,8 @@
         </p:nvSpPr>
         <p:spPr>
           <a:xfrm>
-            <a:off x="914400" y="5852160"/>
-            <a:ext cx="10058400" cy="457200"/>
+            <a:off x="914400" y="3657600"/>
+            <a:ext cx="10332720" cy="731520"/>
           </a:xfrm>
           <a:prstGeom prst="rect">
             <a:avLst/>
@@ -3228,13 +3235,49 @@
           <a:noFill/>
         </p:spPr>
         <p:txBody>
-          <a:bodyPr wrap="none">
+          <a:bodyPr wrap="square" anchor="t">
             <a:spAutoFit/>
           </a:bodyPr>
           <a:lstStyle/>
           <a:p>
-            <a:pPr>
-              <a:defRPr sz="1400">
+            <a:pPr algn="l">
+              <a:defRPr sz="3000" b="0">
+                <a:solidFill>
+                  <a:srgbClr val="38AEEB"/>
+                </a:solidFill>
+                <a:latin typeface="Segoe UI"/>
+              </a:defRPr>
+            </a:pPr>
+            <a:r>
+              <a:t>Reminders, where you already work.</a:t>
+            </a:r>
+          </a:p>
+        </p:txBody>
+      </p:sp>
+      <p:sp>
+        <p:nvSpPr>
+          <p:cNvPr id="6" name="TextBox 5"/>
+          <p:cNvSpPr txBox="1"/>
+          <p:nvPr/>
+        </p:nvSpPr>
+        <p:spPr>
+          <a:xfrm>
+            <a:off x="914400" y="6035040"/>
+            <a:ext cx="10332720" cy="457200"/>
+          </a:xfrm>
+          <a:prstGeom prst="rect">
+            <a:avLst/>
+          </a:prstGeom>
+          <a:noFill/>
+        </p:spPr>
+        <p:txBody>
+          <a:bodyPr wrap="square" anchor="t">
+            <a:spAutoFit/>
+          </a:bodyPr>
+          <a:lstStyle/>
+          <a:p>
+            <a:pPr algn="l">
+              <a:defRPr sz="1300" b="0">
                 <a:solidFill>
                   <a:srgbClr val="B0C8DC"/>
                 </a:solidFill>
@@ -3267,53 +3310,36 @@
       <p:grpSpPr/>
       <p:sp>
         <p:nvSpPr>
-          <p:cNvPr id="2" name="Rectangle 1"/>
-          <p:cNvSpPr/>
+          <p:cNvPr id="2" name="TextBox 1"/>
+          <p:cNvSpPr txBox="1"/>
           <p:nvPr/>
         </p:nvSpPr>
         <p:spPr>
           <a:xfrm>
-            <a:off x="0" y="0"/>
-            <a:ext cx="12191695" cy="822960"/>
-          </a:xfrm>
-          <a:prstGeom prst="rect">
-            <a:avLst/>
-          </a:prstGeom>
-          <a:solidFill>
-            <a:srgbClr val="38AEEB"/>
-          </a:solidFill>
-          <a:ln>
-            <a:noFill/>
-          </a:ln>
-        </p:spPr>
-        <p:style>
-          <a:lnRef idx="1">
-            <a:schemeClr val="accent1"/>
-          </a:lnRef>
-          <a:fillRef idx="3">
-            <a:schemeClr val="accent1"/>
-          </a:fillRef>
-          <a:effectRef idx="2">
-            <a:schemeClr val="accent1"/>
-          </a:effectRef>
-          <a:fontRef idx="minor">
-            <a:schemeClr val="lt1"/>
-          </a:fontRef>
-        </p:style>
-        <p:txBody>
-          <a:bodyPr rtlCol="0" anchor="ctr" lIns="457200" rIns="457200" tIns="137160" bIns="137160"/>
+            <a:off x="914400" y="2468880"/>
+            <a:ext cx="10332720" cy="1645920"/>
+          </a:xfrm>
+          <a:prstGeom prst="rect">
+            <a:avLst/>
+          </a:prstGeom>
+          <a:noFill/>
+        </p:spPr>
+        <p:txBody>
+          <a:bodyPr wrap="square" anchor="ctr">
+            <a:spAutoFit/>
+          </a:bodyPr>
           <a:lstStyle/>
           <a:p>
             <a:pPr algn="ctr">
-              <a:defRPr sz="2800" b="1">
-                <a:solidFill>
-                  <a:srgbClr val="FFFFFF"/>
+              <a:defRPr sz="4600" b="1">
+                <a:solidFill>
+                  <a:srgbClr val="1F2D3D"/>
                 </a:solidFill>
                 <a:latin typeface="Segoe UI"/>
               </a:defRPr>
             </a:pPr>
             <a:r>
-              <a:t>What it is</a:t>
+              <a:t>Stop forgetting things in five different apps.</a:t>
             </a:r>
           </a:p>
         </p:txBody>
@@ -3326,8 +3352,8 @@
         </p:nvSpPr>
         <p:spPr>
           <a:xfrm>
-            <a:off x="457200" y="1188720"/>
-            <a:ext cx="4846320" cy="5029200"/>
+            <a:off x="1371600" y="4206240"/>
+            <a:ext cx="9418320" cy="1371600"/>
           </a:xfrm>
           <a:prstGeom prst="rect">
             <a:avLst/>
@@ -3335,184 +3361,48 @@
           <a:noFill/>
         </p:spPr>
         <p:txBody>
-          <a:bodyPr wrap="square">
+          <a:bodyPr wrap="square" anchor="t">
             <a:spAutoFit/>
           </a:bodyPr>
           <a:lstStyle/>
           <a:p>
-            <a:pPr>
-              <a:spcAft>
-                <a:spcPts val="600"/>
-              </a:spcAft>
-              <a:defRPr sz="1700">
-                <a:solidFill>
-                  <a:srgbClr val="242424"/>
+            <a:pPr algn="ctr">
+              <a:defRPr sz="2000" b="0">
+                <a:solidFill>
+                  <a:srgbClr val="708095"/>
                 </a:solidFill>
                 <a:latin typeface="Segoe UI"/>
               </a:defRPr>
             </a:pPr>
             <a:r>
-              <a:t>Add what you need to remember today.</a:t>
-            </a:r>
-          </a:p>
-          <a:p>
-            <a:pPr>
-              <a:spcAft>
-                <a:spcPts val="600"/>
-              </a:spcAft>
-              <a:defRPr sz="1700">
-                <a:solidFill>
-                  <a:srgbClr val="242424"/>
+              <a:t>Day Reminders is a tab + bot inside Teams.</a:t>
+            </a:r>
+          </a:p>
+          <a:p>
+            <a:pPr algn="ctr">
+              <a:defRPr sz="2000" b="0">
+                <a:solidFill>
+                  <a:srgbClr val="708095"/>
                 </a:solidFill>
                 <a:latin typeface="Segoe UI"/>
               </a:defRPr>
             </a:pPr>
             <a:r>
-              <a:t>The bot pings you in chat before each one.</a:t>
-            </a:r>
-          </a:p>
-          <a:p>
-            <a:pPr>
-              <a:spcAft>
-                <a:spcPts val="600"/>
-              </a:spcAft>
-              <a:defRPr sz="1700">
-                <a:solidFill>
-                  <a:srgbClr val="242424"/>
-                </a:solidFill>
-                <a:latin typeface="Segoe UI"/>
-              </a:defRPr>
-            </a:pPr>
-            <a:r>
-              <a:t>Mark it done from the card. Snooze it. Move on.</a:t>
-            </a:r>
-          </a:p>
-          <a:p>
-            <a:pPr>
-              <a:spcAft>
-                <a:spcPts val="600"/>
-              </a:spcAft>
-              <a:defRPr sz="1700">
-                <a:solidFill>
-                  <a:srgbClr val="242424"/>
-                </a:solidFill>
-                <a:latin typeface="Segoe UI"/>
-              </a:defRPr>
-            </a:pPr>
-          </a:p>
-          <a:p>
-            <a:pPr>
-              <a:spcAft>
-                <a:spcPts val="600"/>
-              </a:spcAft>
-              <a:defRPr sz="1700">
-                <a:solidFill>
-                  <a:srgbClr val="242424"/>
-                </a:solidFill>
-                <a:latin typeface="Segoe UI"/>
-              </a:defRPr>
-            </a:pPr>
-            <a:r>
-              <a:t>No flipping to a separate app — it lives where you already work.</a:t>
-            </a:r>
-          </a:p>
-          <a:p>
-            <a:pPr>
-              <a:spcAft>
-                <a:spcPts val="600"/>
-              </a:spcAft>
-              <a:defRPr sz="1700">
-                <a:solidFill>
-                  <a:srgbClr val="242424"/>
-                </a:solidFill>
-                <a:latin typeface="Segoe UI"/>
-              </a:defRPr>
-            </a:pPr>
-          </a:p>
-          <a:p>
-            <a:pPr>
-              <a:spcAft>
-                <a:spcPts val="600"/>
-              </a:spcAft>
-              <a:defRPr sz="1700">
-                <a:solidFill>
-                  <a:srgbClr val="242424"/>
-                </a:solidFill>
-                <a:latin typeface="Segoe UI"/>
-              </a:defRPr>
-            </a:pPr>
-            <a:r>
-              <a:t>Where to find it:</a:t>
-            </a:r>
-          </a:p>
-          <a:p>
-            <a:pPr>
-              <a:spcAft>
-                <a:spcPts val="600"/>
-              </a:spcAft>
-              <a:defRPr sz="1700">
-                <a:solidFill>
-                  <a:srgbClr val="242424"/>
-                </a:solidFill>
-                <a:latin typeface="Segoe UI"/>
-              </a:defRPr>
-            </a:pPr>
-            <a:r>
-              <a:t>•  Alarm-clock icon in your Teams left rail.</a:t>
-            </a:r>
-          </a:p>
-          <a:p>
-            <a:pPr>
-              <a:spcAft>
-                <a:spcPts val="600"/>
-              </a:spcAft>
-              <a:defRPr sz="1700">
-                <a:solidFill>
-                  <a:srgbClr val="242424"/>
-                </a:solidFill>
-                <a:latin typeface="Segoe UI"/>
-              </a:defRPr>
-            </a:pPr>
-            <a:r>
-              <a:t>•  Two top tabs: Reminders (the UI) and Chat (where the bot pings you).</a:t>
-            </a:r>
-          </a:p>
-        </p:txBody>
-      </p:sp>
-      <p:pic>
-        <p:nvPicPr>
-          <p:cNvPr id="4" name="Picture 3" descr="01-left-rail.png"/>
-          <p:cNvPicPr>
-            <a:picLocks noChangeAspect="1"/>
-          </p:cNvPicPr>
-          <p:nvPr/>
-        </p:nvPicPr>
-        <p:blipFill>
-          <a:blip r:embed="rId2"/>
-          <a:stretch>
-            <a:fillRect/>
-          </a:stretch>
-        </p:blipFill>
-        <p:spPr>
-          <a:xfrm>
-            <a:off x="5486400" y="1811807"/>
-            <a:ext cx="6245352" cy="3783026"/>
-          </a:xfrm>
-          <a:prstGeom prst="rect">
-            <a:avLst/>
-          </a:prstGeom>
-        </p:spPr>
-      </p:pic>
-      <p:sp>
-        <p:nvSpPr>
-          <p:cNvPr id="5" name="TextBox 4"/>
+              <a:t>You add things; the bot pings you in chat before each one's due.</a:t>
+            </a:r>
+          </a:p>
+        </p:txBody>
+      </p:sp>
+      <p:sp>
+        <p:nvSpPr>
+          <p:cNvPr id="4" name="TextBox 3"/>
           <p:cNvSpPr txBox="1"/>
           <p:nvPr/>
         </p:nvSpPr>
         <p:spPr>
           <a:xfrm>
-            <a:off x="457200" y="6446520"/>
-            <a:ext cx="11277295" cy="320040"/>
+            <a:off x="457200" y="6492240"/>
+            <a:ext cx="11277295" cy="274320"/>
           </a:xfrm>
           <a:prstGeom prst="rect">
             <a:avLst/>
@@ -3520,15 +3410,15 @@
           <a:noFill/>
         </p:spPr>
         <p:txBody>
-          <a:bodyPr wrap="none">
+          <a:bodyPr wrap="square" anchor="t">
             <a:spAutoFit/>
           </a:bodyPr>
           <a:lstStyle/>
           <a:p>
             <a:pPr algn="r">
-              <a:defRPr sz="1000">
-                <a:solidFill>
-                  <a:srgbClr val="616161"/>
+              <a:defRPr sz="900" b="0">
+                <a:solidFill>
+                  <a:srgbClr val="708095"/>
                 </a:solidFill>
                 <a:latin typeface="Segoe UI"/>
               </a:defRPr>
@@ -3559,14 +3449,50 @@
       <p:grpSpPr/>
       <p:sp>
         <p:nvSpPr>
-          <p:cNvPr id="2" name="Rectangle 1"/>
+          <p:cNvPr id="2" name="TextBox 1"/>
+          <p:cNvSpPr txBox="1"/>
+          <p:nvPr/>
+        </p:nvSpPr>
+        <p:spPr>
+          <a:xfrm>
+            <a:off x="640080" y="502920"/>
+            <a:ext cx="10911535" cy="731520"/>
+          </a:xfrm>
+          <a:prstGeom prst="rect">
+            <a:avLst/>
+          </a:prstGeom>
+          <a:noFill/>
+        </p:spPr>
+        <p:txBody>
+          <a:bodyPr wrap="square" anchor="t">
+            <a:spAutoFit/>
+          </a:bodyPr>
+          <a:lstStyle/>
+          <a:p>
+            <a:pPr algn="l">
+              <a:defRPr sz="3000" b="1">
+                <a:solidFill>
+                  <a:srgbClr val="1F2D3D"/>
+                </a:solidFill>
+                <a:latin typeface="Segoe UI"/>
+              </a:defRPr>
+            </a:pPr>
+            <a:r>
+              <a:t>Find it in your Teams left rail.</a:t>
+            </a:r>
+          </a:p>
+        </p:txBody>
+      </p:sp>
+      <p:sp>
+        <p:nvSpPr>
+          <p:cNvPr id="3" name="Rectangle 2"/>
           <p:cNvSpPr/>
           <p:nvPr/>
         </p:nvSpPr>
         <p:spPr>
           <a:xfrm>
-            <a:off x="0" y="0"/>
-            <a:ext cx="12191695" cy="822960"/>
+            <a:off x="640080" y="1143000"/>
+            <a:ext cx="502920" cy="54864"/>
           </a:xfrm>
           <a:prstGeom prst="rect">
             <a:avLst/>
@@ -3593,174 +3519,16 @@
           </a:fontRef>
         </p:style>
         <p:txBody>
-          <a:bodyPr rtlCol="0" anchor="ctr" lIns="457200" rIns="457200" tIns="137160" bIns="137160"/>
-          <a:lstStyle/>
-          <a:p>
-            <a:pPr algn="ctr">
-              <a:defRPr sz="2800" b="1">
-                <a:solidFill>
-                  <a:srgbClr val="FFFFFF"/>
-                </a:solidFill>
-                <a:latin typeface="Segoe UI"/>
-              </a:defRPr>
-            </a:pPr>
-            <a:r>
-              <a:t>Adding a reminder</a:t>
-            </a:r>
-          </a:p>
-        </p:txBody>
-      </p:sp>
-      <p:sp>
-        <p:nvSpPr>
-          <p:cNvPr id="3" name="TextBox 2"/>
-          <p:cNvSpPr txBox="1"/>
-          <p:nvPr/>
-        </p:nvSpPr>
-        <p:spPr>
-          <a:xfrm>
-            <a:off x="457200" y="1188720"/>
-            <a:ext cx="4846320" cy="5029200"/>
-          </a:xfrm>
-          <a:prstGeom prst="rect">
-            <a:avLst/>
-          </a:prstGeom>
-          <a:noFill/>
-        </p:spPr>
-        <p:txBody>
-          <a:bodyPr wrap="square">
-            <a:spAutoFit/>
-          </a:bodyPr>
-          <a:lstStyle/>
-          <a:p>
-            <a:pPr>
-              <a:spcAft>
-                <a:spcPts val="600"/>
-              </a:spcAft>
-              <a:defRPr sz="1700">
-                <a:solidFill>
-                  <a:srgbClr val="242424"/>
-                </a:solidFill>
-                <a:latin typeface="Segoe UI"/>
-              </a:defRPr>
-            </a:pPr>
-            <a:r>
-              <a:t>Top of the Reminders tab — fill in the add form:</a:t>
-            </a:r>
-          </a:p>
-          <a:p>
-            <a:pPr>
-              <a:spcAft>
-                <a:spcPts val="600"/>
-              </a:spcAft>
-              <a:defRPr sz="1700">
-                <a:solidFill>
-                  <a:srgbClr val="242424"/>
-                </a:solidFill>
-                <a:latin typeface="Segoe UI"/>
-              </a:defRPr>
-            </a:pPr>
-            <a:r>
-              <a:t>•  Title — what to remember. Add #tags inline (e.g. Send report #work).</a:t>
-            </a:r>
-          </a:p>
-          <a:p>
-            <a:pPr>
-              <a:spcAft>
-                <a:spcPts val="600"/>
-              </a:spcAft>
-              <a:defRPr sz="1700">
-                <a:solidFill>
-                  <a:srgbClr val="242424"/>
-                </a:solidFill>
-                <a:latin typeface="Segoe UI"/>
-              </a:defRPr>
-            </a:pPr>
-            <a:r>
-              <a:t>•  Client — optional, tracks which engagement; autocompletes from past clients.</a:t>
-            </a:r>
-          </a:p>
-          <a:p>
-            <a:pPr>
-              <a:spcAft>
-                <a:spcPts val="600"/>
-              </a:spcAft>
-              <a:defRPr sz="1700">
-                <a:solidFill>
-                  <a:srgbClr val="242424"/>
-                </a:solidFill>
-                <a:latin typeface="Segoe UI"/>
-              </a:defRPr>
-            </a:pPr>
-            <a:r>
-              <a:t>•  Due date — defaults to today; pick any other day.</a:t>
-            </a:r>
-          </a:p>
-          <a:p>
-            <a:pPr>
-              <a:spcAft>
-                <a:spcPts val="600"/>
-              </a:spcAft>
-              <a:defRPr sz="1700">
-                <a:solidFill>
-                  <a:srgbClr val="242424"/>
-                </a:solidFill>
-                <a:latin typeface="Segoe UI"/>
-              </a:defRPr>
-            </a:pPr>
-            <a:r>
-              <a:t>•  Time — optional. Leave blank for an 'anytime today' item.</a:t>
-            </a:r>
-          </a:p>
-          <a:p>
-            <a:pPr>
-              <a:spcAft>
-                <a:spcPts val="600"/>
-              </a:spcAft>
-              <a:defRPr sz="1700">
-                <a:solidFill>
-                  <a:srgbClr val="242424"/>
-                </a:solidFill>
-                <a:latin typeface="Segoe UI"/>
-              </a:defRPr>
-            </a:pPr>
-            <a:r>
-              <a:t>•  + Details — toggle for notes, links, sub-tasks (up to 2000 chars).</a:t>
-            </a:r>
-          </a:p>
-          <a:p>
-            <a:pPr>
-              <a:spcAft>
-                <a:spcPts val="600"/>
-              </a:spcAft>
-              <a:defRPr sz="1700">
-                <a:solidFill>
-                  <a:srgbClr val="242424"/>
-                </a:solidFill>
-                <a:latin typeface="Segoe UI"/>
-              </a:defRPr>
-            </a:pPr>
-          </a:p>
-          <a:p>
-            <a:pPr>
-              <a:spcAft>
-                <a:spcPts val="600"/>
-              </a:spcAft>
-              <a:defRPr sz="1700">
-                <a:solidFill>
-                  <a:srgbClr val="242424"/>
-                </a:solidFill>
-                <a:latin typeface="Segoe UI"/>
-              </a:defRPr>
-            </a:pPr>
-            <a:r>
-              <a:t>Press Add (or hit Enter in the title field).</a:t>
-            </a:r>
+          <a:bodyPr rtlCol="0" anchor="ctr"/>
+          <a:lstStyle/>
+          <a:p>
+            <a:pPr algn="ctr"/>
           </a:p>
         </p:txBody>
       </p:sp>
       <p:pic>
         <p:nvPicPr>
-          <p:cNvPr id="4" name="Picture 3" descr="02-add-form.png"/>
+          <p:cNvPr id="4" name="Picture 3" descr="01-left-rail.png"/>
           <p:cNvPicPr>
             <a:picLocks noChangeAspect="1"/>
           </p:cNvPicPr>
@@ -3774,24 +3542,48 @@
         </p:blipFill>
         <p:spPr>
           <a:xfrm>
-            <a:off x="5486400" y="1811807"/>
-            <a:ext cx="6245352" cy="3783026"/>
+            <a:off x="457200" y="2706329"/>
+            <a:ext cx="3291840" cy="1993981"/>
           </a:xfrm>
           <a:prstGeom prst="rect">
             <a:avLst/>
           </a:prstGeom>
         </p:spPr>
       </p:pic>
-      <p:sp>
-        <p:nvSpPr>
-          <p:cNvPr id="5" name="TextBox 4"/>
+      <p:pic>
+        <p:nvPicPr>
+          <p:cNvPr id="5" name="Picture 4" descr="03-lines-view.png"/>
+          <p:cNvPicPr>
+            <a:picLocks noChangeAspect="1"/>
+          </p:cNvPicPr>
+          <p:nvPr/>
+        </p:nvPicPr>
+        <p:blipFill>
+          <a:blip r:embed="rId3"/>
+          <a:stretch>
+            <a:fillRect/>
+          </a:stretch>
+        </p:blipFill>
+        <p:spPr>
+          <a:xfrm>
+            <a:off x="4331434" y="1554480"/>
+            <a:ext cx="7094986" cy="4297680"/>
+          </a:xfrm>
+          <a:prstGeom prst="rect">
+            <a:avLst/>
+          </a:prstGeom>
+        </p:spPr>
+      </p:pic>
+      <p:sp>
+        <p:nvSpPr>
+          <p:cNvPr id="6" name="TextBox 5"/>
           <p:cNvSpPr txBox="1"/>
           <p:nvPr/>
         </p:nvSpPr>
         <p:spPr>
           <a:xfrm>
-            <a:off x="457200" y="6446520"/>
-            <a:ext cx="11277295" cy="320040"/>
+            <a:off x="640080" y="6080760"/>
+            <a:ext cx="10911535" cy="457200"/>
           </a:xfrm>
           <a:prstGeom prst="rect">
             <a:avLst/>
@@ -3799,15 +3591,51 @@
           <a:noFill/>
         </p:spPr>
         <p:txBody>
-          <a:bodyPr wrap="none">
+          <a:bodyPr wrap="square" anchor="t">
             <a:spAutoFit/>
           </a:bodyPr>
           <a:lstStyle/>
           <a:p>
+            <a:pPr algn="ctr">
+              <a:defRPr sz="1400" b="0">
+                <a:solidFill>
+                  <a:srgbClr val="708095"/>
+                </a:solidFill>
+                <a:latin typeface="Segoe UI"/>
+              </a:defRPr>
+            </a:pPr>
+            <a:r>
+              <a:t>Alarm-clock icon in the rail.   →   Two top tabs: Reminders (the UI) and Chat (where the bot pings you).</a:t>
+            </a:r>
+          </a:p>
+        </p:txBody>
+      </p:sp>
+      <p:sp>
+        <p:nvSpPr>
+          <p:cNvPr id="7" name="TextBox 6"/>
+          <p:cNvSpPr txBox="1"/>
+          <p:nvPr/>
+        </p:nvSpPr>
+        <p:spPr>
+          <a:xfrm>
+            <a:off x="457200" y="6492240"/>
+            <a:ext cx="11277295" cy="274320"/>
+          </a:xfrm>
+          <a:prstGeom prst="rect">
+            <a:avLst/>
+          </a:prstGeom>
+          <a:noFill/>
+        </p:spPr>
+        <p:txBody>
+          <a:bodyPr wrap="square" anchor="t">
+            <a:spAutoFit/>
+          </a:bodyPr>
+          <a:lstStyle/>
+          <a:p>
             <a:pPr algn="r">
-              <a:defRPr sz="1000">
-                <a:solidFill>
-                  <a:srgbClr val="616161"/>
+              <a:defRPr sz="900" b="0">
+                <a:solidFill>
+                  <a:srgbClr val="708095"/>
                 </a:solidFill>
                 <a:latin typeface="Segoe UI"/>
               </a:defRPr>
@@ -3838,14 +3666,50 @@
       <p:grpSpPr/>
       <p:sp>
         <p:nvSpPr>
-          <p:cNvPr id="2" name="Rectangle 1"/>
+          <p:cNvPr id="2" name="TextBox 1"/>
+          <p:cNvSpPr txBox="1"/>
+          <p:nvPr/>
+        </p:nvSpPr>
+        <p:spPr>
+          <a:xfrm>
+            <a:off x="640080" y="502920"/>
+            <a:ext cx="10911535" cy="731520"/>
+          </a:xfrm>
+          <a:prstGeom prst="rect">
+            <a:avLst/>
+          </a:prstGeom>
+          <a:noFill/>
+        </p:spPr>
+        <p:txBody>
+          <a:bodyPr wrap="square" anchor="t">
+            <a:spAutoFit/>
+          </a:bodyPr>
+          <a:lstStyle/>
+          <a:p>
+            <a:pPr algn="l">
+              <a:defRPr sz="3000" b="1">
+                <a:solidFill>
+                  <a:srgbClr val="1F2D3D"/>
+                </a:solidFill>
+                <a:latin typeface="Segoe UI"/>
+              </a:defRPr>
+            </a:pPr>
+            <a:r>
+              <a:t>Adding a reminder.</a:t>
+            </a:r>
+          </a:p>
+        </p:txBody>
+      </p:sp>
+      <p:sp>
+        <p:nvSpPr>
+          <p:cNvPr id="3" name="Rectangle 2"/>
           <p:cNvSpPr/>
           <p:nvPr/>
         </p:nvSpPr>
         <p:spPr>
           <a:xfrm>
-            <a:off x="0" y="0"/>
-            <a:ext cx="12191695" cy="822960"/>
+            <a:off x="640080" y="1143000"/>
+            <a:ext cx="502920" cy="54864"/>
           </a:xfrm>
           <a:prstGeom prst="rect">
             <a:avLst/>
@@ -3872,33 +3736,47 @@
           </a:fontRef>
         </p:style>
         <p:txBody>
-          <a:bodyPr rtlCol="0" anchor="ctr" lIns="457200" rIns="457200" tIns="137160" bIns="137160"/>
-          <a:lstStyle/>
-          <a:p>
-            <a:pPr algn="ctr">
-              <a:defRPr sz="2800" b="1">
-                <a:solidFill>
-                  <a:srgbClr val="FFFFFF"/>
-                </a:solidFill>
-                <a:latin typeface="Segoe UI"/>
-              </a:defRPr>
-            </a:pPr>
-            <a:r>
-              <a:t>Three ways to add</a:t>
-            </a:r>
-          </a:p>
-        </p:txBody>
-      </p:sp>
-      <p:sp>
-        <p:nvSpPr>
-          <p:cNvPr id="3" name="TextBox 2"/>
+          <a:bodyPr rtlCol="0" anchor="ctr"/>
+          <a:lstStyle/>
+          <a:p>
+            <a:pPr algn="ctr"/>
+          </a:p>
+        </p:txBody>
+      </p:sp>
+      <p:pic>
+        <p:nvPicPr>
+          <p:cNvPr id="4" name="Picture 3" descr="02-add-form.png"/>
+          <p:cNvPicPr>
+            <a:picLocks noChangeAspect="1"/>
+          </p:cNvPicPr>
+          <p:nvPr/>
+        </p:nvPicPr>
+        <p:blipFill>
+          <a:blip r:embed="rId2"/>
+          <a:stretch>
+            <a:fillRect/>
+          </a:stretch>
+        </p:blipFill>
+        <p:spPr>
+          <a:xfrm>
+            <a:off x="2435136" y="1508760"/>
+            <a:ext cx="7321422" cy="4434840"/>
+          </a:xfrm>
+          <a:prstGeom prst="rect">
+            <a:avLst/>
+          </a:prstGeom>
+        </p:spPr>
+      </p:pic>
+      <p:sp>
+        <p:nvSpPr>
+          <p:cNvPr id="5" name="TextBox 4"/>
           <p:cNvSpPr txBox="1"/>
           <p:nvPr/>
         </p:nvSpPr>
         <p:spPr>
           <a:xfrm>
-            <a:off x="548640" y="1188720"/>
-            <a:ext cx="10972800" cy="5029200"/>
+            <a:off x="640080" y="6080760"/>
+            <a:ext cx="10911535" cy="457200"/>
           </a:xfrm>
           <a:prstGeom prst="rect">
             <a:avLst/>
@@ -3906,192 +3784,35 @@
           <a:noFill/>
         </p:spPr>
         <p:txBody>
-          <a:bodyPr wrap="square">
+          <a:bodyPr wrap="square" anchor="t">
             <a:spAutoFit/>
           </a:bodyPr>
           <a:lstStyle/>
           <a:p>
-            <a:pPr>
-              <a:spcAft>
-                <a:spcPts val="600"/>
-              </a:spcAft>
-              <a:defRPr sz="1700">
-                <a:solidFill>
-                  <a:srgbClr val="242424"/>
+            <a:pPr algn="ctr">
+              <a:defRPr sz="1400" b="0">
+                <a:solidFill>
+                  <a:srgbClr val="708095"/>
                 </a:solidFill>
                 <a:latin typeface="Segoe UI"/>
               </a:defRPr>
             </a:pPr>
             <a:r>
-              <a:t>1.  From the tab — the add form covered on the previous slide.</a:t>
-            </a:r>
-          </a:p>
-          <a:p>
-            <a:pPr>
-              <a:spcAft>
-                <a:spcPts val="600"/>
-              </a:spcAft>
-              <a:defRPr sz="1700">
-                <a:solidFill>
-                  <a:srgbClr val="242424"/>
-                </a:solidFill>
-                <a:latin typeface="Segoe UI"/>
-              </a:defRPr>
-            </a:pPr>
-          </a:p>
-          <a:p>
-            <a:pPr>
-              <a:spcAft>
-                <a:spcPts val="600"/>
-              </a:spcAft>
-              <a:defRPr sz="1700">
-                <a:solidFill>
-                  <a:srgbClr val="242424"/>
-                </a:solidFill>
-                <a:latin typeface="Segoe UI"/>
-              </a:defRPr>
-            </a:pPr>
-            <a:r>
-              <a:t>2.  From bot chat — type slash commands in your Day Reminders chat:</a:t>
-            </a:r>
-          </a:p>
-          <a:p>
-            <a:pPr>
-              <a:spcAft>
-                <a:spcPts val="600"/>
-              </a:spcAft>
-              <a:defRPr sz="1700">
-                <a:solidFill>
-                  <a:srgbClr val="242424"/>
-                </a:solidFill>
-                <a:latin typeface="Segoe UI"/>
-              </a:defRPr>
-            </a:pPr>
-            <a:r>
-              <a:t>        /add 5pm tomorrow #work Send weekly report</a:t>
-            </a:r>
-          </a:p>
-          <a:p>
-            <a:pPr>
-              <a:spcAft>
-                <a:spcPts val="600"/>
-              </a:spcAft>
-              <a:defRPr sz="1700">
-                <a:solidFill>
-                  <a:srgbClr val="242424"/>
-                </a:solidFill>
-                <a:latin typeface="Segoe UI"/>
-              </a:defRPr>
-            </a:pPr>
-            <a:r>
-              <a:t>        /list  —  see what's open today</a:t>
-            </a:r>
-          </a:p>
-          <a:p>
-            <a:pPr>
-              <a:spcAft>
-                <a:spcPts val="600"/>
-              </a:spcAft>
-              <a:defRPr sz="1700">
-                <a:solidFill>
-                  <a:srgbClr val="242424"/>
-                </a:solidFill>
-                <a:latin typeface="Segoe UI"/>
-              </a:defRPr>
-            </a:pPr>
-            <a:r>
-              <a:t>        /done &lt;substring&gt;  —  mark a matching item done</a:t>
-            </a:r>
-          </a:p>
-          <a:p>
-            <a:pPr>
-              <a:spcAft>
-                <a:spcPts val="600"/>
-              </a:spcAft>
-              <a:defRPr sz="1700">
-                <a:solidFill>
-                  <a:srgbClr val="242424"/>
-                </a:solidFill>
-                <a:latin typeface="Segoe UI"/>
-              </a:defRPr>
-            </a:pPr>
-            <a:r>
-              <a:t>        /help  —  show all commands</a:t>
-            </a:r>
-          </a:p>
-          <a:p>
-            <a:pPr>
-              <a:spcAft>
-                <a:spcPts val="600"/>
-              </a:spcAft>
-              <a:defRPr sz="1700">
-                <a:solidFill>
-                  <a:srgbClr val="242424"/>
-                </a:solidFill>
-                <a:latin typeface="Segoe UI"/>
-              </a:defRPr>
-            </a:pPr>
-          </a:p>
-          <a:p>
-            <a:pPr>
-              <a:spcAft>
-                <a:spcPts val="600"/>
-              </a:spcAft>
-              <a:defRPr sz="1700">
-                <a:solidFill>
-                  <a:srgbClr val="242424"/>
-                </a:solidFill>
-                <a:latin typeface="Segoe UI"/>
-              </a:defRPr>
-            </a:pPr>
-            <a:r>
-              <a:t>3.  From any Teams chat — click the ... menu under the message box,</a:t>
-            </a:r>
-          </a:p>
-          <a:p>
-            <a:pPr>
-              <a:spcAft>
-                <a:spcPts val="600"/>
-              </a:spcAft>
-              <a:defRPr sz="1700">
-                <a:solidFill>
-                  <a:srgbClr val="242424"/>
-                </a:solidFill>
-                <a:latin typeface="Segoe UI"/>
-              </a:defRPr>
-            </a:pPr>
-            <a:r>
-              <a:t>        pick Day Reminders → Quick add reminder, type, submit.</a:t>
-            </a:r>
-          </a:p>
-          <a:p>
-            <a:pPr>
-              <a:spcAft>
-                <a:spcPts val="600"/>
-              </a:spcAft>
-              <a:defRPr sz="1700">
-                <a:solidFill>
-                  <a:srgbClr val="242424"/>
-                </a:solidFill>
-                <a:latin typeface="Segoe UI"/>
-              </a:defRPr>
-            </a:pPr>
-            <a:r>
-              <a:t>        Great when you're mid-conversation and remember something.</a:t>
-            </a:r>
-          </a:p>
-        </p:txBody>
-      </p:sp>
-      <p:sp>
-        <p:nvSpPr>
-          <p:cNvPr id="4" name="TextBox 3"/>
+              <a:t>Title  ·  Client (autocompletes from your past)  ·  Date (defaults to today)  ·  Time (optional)  ·  + Details for notes / links / sub-tasks</a:t>
+            </a:r>
+          </a:p>
+        </p:txBody>
+      </p:sp>
+      <p:sp>
+        <p:nvSpPr>
+          <p:cNvPr id="6" name="TextBox 5"/>
           <p:cNvSpPr txBox="1"/>
           <p:nvPr/>
         </p:nvSpPr>
         <p:spPr>
           <a:xfrm>
-            <a:off x="457200" y="6446520"/>
-            <a:ext cx="11277295" cy="320040"/>
+            <a:off x="457200" y="6492240"/>
+            <a:ext cx="11277295" cy="274320"/>
           </a:xfrm>
           <a:prstGeom prst="rect">
             <a:avLst/>
@@ -4099,15 +3820,15 @@
           <a:noFill/>
         </p:spPr>
         <p:txBody>
-          <a:bodyPr wrap="none">
+          <a:bodyPr wrap="square" anchor="t">
             <a:spAutoFit/>
           </a:bodyPr>
           <a:lstStyle/>
           <a:p>
             <a:pPr algn="r">
-              <a:defRPr sz="1000">
-                <a:solidFill>
-                  <a:srgbClr val="616161"/>
+              <a:defRPr sz="900" b="0">
+                <a:solidFill>
+                  <a:srgbClr val="708095"/>
                 </a:solidFill>
                 <a:latin typeface="Segoe UI"/>
               </a:defRPr>
@@ -4138,14 +3859,50 @@
       <p:grpSpPr/>
       <p:sp>
         <p:nvSpPr>
-          <p:cNvPr id="2" name="Rectangle 1"/>
+          <p:cNvPr id="2" name="TextBox 1"/>
+          <p:cNvSpPr txBox="1"/>
+          <p:nvPr/>
+        </p:nvSpPr>
+        <p:spPr>
+          <a:xfrm>
+            <a:off x="640080" y="502920"/>
+            <a:ext cx="10911535" cy="731520"/>
+          </a:xfrm>
+          <a:prstGeom prst="rect">
+            <a:avLst/>
+          </a:prstGeom>
+          <a:noFill/>
+        </p:spPr>
+        <p:txBody>
+          <a:bodyPr wrap="square" anchor="t">
+            <a:spAutoFit/>
+          </a:bodyPr>
+          <a:lstStyle/>
+          <a:p>
+            <a:pPr algn="l">
+              <a:defRPr sz="3000" b="1">
+                <a:solidFill>
+                  <a:srgbClr val="1F2D3D"/>
+                </a:solidFill>
+                <a:latin typeface="Segoe UI"/>
+              </a:defRPr>
+            </a:pPr>
+            <a:r>
+              <a:t>Three ways to add one.</a:t>
+            </a:r>
+          </a:p>
+        </p:txBody>
+      </p:sp>
+      <p:sp>
+        <p:nvSpPr>
+          <p:cNvPr id="3" name="Rectangle 2"/>
           <p:cNvSpPr/>
           <p:nvPr/>
         </p:nvSpPr>
         <p:spPr>
           <a:xfrm>
-            <a:off x="0" y="0"/>
-            <a:ext cx="12191695" cy="822960"/>
+            <a:off x="640080" y="1143000"/>
+            <a:ext cx="502920" cy="54864"/>
           </a:xfrm>
           <a:prstGeom prst="rect">
             <a:avLst/>
@@ -4172,11 +3929,54 @@
           </a:fontRef>
         </p:style>
         <p:txBody>
-          <a:bodyPr rtlCol="0" anchor="ctr" lIns="457200" rIns="457200" tIns="137160" bIns="137160"/>
+          <a:bodyPr rtlCol="0" anchor="ctr"/>
+          <a:lstStyle/>
+          <a:p>
+            <a:pPr algn="ctr"/>
+          </a:p>
+        </p:txBody>
+      </p:sp>
+      <p:sp>
+        <p:nvSpPr>
+          <p:cNvPr id="4" name="Oval 3"/>
+          <p:cNvSpPr/>
+          <p:nvPr/>
+        </p:nvSpPr>
+        <p:spPr>
+          <a:xfrm>
+            <a:off x="640080" y="1828800"/>
+            <a:ext cx="502920" cy="502920"/>
+          </a:xfrm>
+          <a:prstGeom prst="ellipse">
+            <a:avLst/>
+          </a:prstGeom>
+          <a:solidFill>
+            <a:srgbClr val="38AEEB"/>
+          </a:solidFill>
+          <a:ln>
+            <a:noFill/>
+          </a:ln>
+        </p:spPr>
+        <p:style>
+          <a:lnRef idx="1">
+            <a:schemeClr val="accent1"/>
+          </a:lnRef>
+          <a:fillRef idx="3">
+            <a:schemeClr val="accent1"/>
+          </a:fillRef>
+          <a:effectRef idx="2">
+            <a:schemeClr val="accent1"/>
+          </a:effectRef>
+          <a:fontRef idx="minor">
+            <a:schemeClr val="lt1"/>
+          </a:fontRef>
+        </p:style>
+        <p:txBody>
+          <a:bodyPr rtlCol="0" anchor="ctr"/>
           <a:lstStyle/>
           <a:p>
             <a:pPr algn="ctr">
-              <a:defRPr sz="2800" b="1">
+              <a:defRPr sz="2000" b="1">
                 <a:solidFill>
                   <a:srgbClr val="FFFFFF"/>
                 </a:solidFill>
@@ -4184,228 +3984,11 @@
               </a:defRPr>
             </a:pPr>
             <a:r>
-              <a:t>Lines view — your daily list</a:t>
-            </a:r>
-          </a:p>
-        </p:txBody>
-      </p:sp>
-      <p:sp>
-        <p:nvSpPr>
-          <p:cNvPr id="3" name="TextBox 2"/>
-          <p:cNvSpPr txBox="1"/>
-          <p:nvPr/>
-        </p:nvSpPr>
-        <p:spPr>
-          <a:xfrm>
-            <a:off x="457200" y="1188720"/>
-            <a:ext cx="4846320" cy="5029200"/>
-          </a:xfrm>
-          <a:prstGeom prst="rect">
-            <a:avLst/>
-          </a:prstGeom>
-          <a:noFill/>
-        </p:spPr>
-        <p:txBody>
-          <a:bodyPr wrap="square">
-            <a:spAutoFit/>
-          </a:bodyPr>
-          <a:lstStyle/>
-          <a:p>
-            <a:pPr>
-              <a:spcAft>
-                <a:spcPts val="600"/>
-              </a:spcAft>
-              <a:defRPr sz="1700">
-                <a:solidFill>
-                  <a:srgbClr val="242424"/>
-                </a:solidFill>
-                <a:latin typeface="Segoe UI"/>
-              </a:defRPr>
-            </a:pPr>
-            <a:r>
-              <a:t>Default view. One row per reminder, sorted by time.</a:t>
-            </a:r>
-          </a:p>
-          <a:p>
-            <a:pPr>
-              <a:spcAft>
-                <a:spcPts val="600"/>
-              </a:spcAft>
-              <a:defRPr sz="1700">
-                <a:solidFill>
-                  <a:srgbClr val="242424"/>
-                </a:solidFill>
-                <a:latin typeface="Segoe UI"/>
-              </a:defRPr>
-            </a:pPr>
-          </a:p>
-          <a:p>
-            <a:pPr>
-              <a:spcAft>
-                <a:spcPts val="600"/>
-              </a:spcAft>
-              <a:defRPr sz="1700">
-                <a:solidFill>
-                  <a:srgbClr val="242424"/>
-                </a:solidFill>
-                <a:latin typeface="Segoe UI"/>
-              </a:defRPr>
-            </a:pPr>
-            <a:r>
-              <a:t>On each row you see:</a:t>
-            </a:r>
-          </a:p>
-          <a:p>
-            <a:pPr>
-              <a:spcAft>
-                <a:spcPts val="600"/>
-              </a:spcAft>
-              <a:defRPr sz="1700">
-                <a:solidFill>
-                  <a:srgbClr val="242424"/>
-                </a:solidFill>
-                <a:latin typeface="Segoe UI"/>
-              </a:defRPr>
-            </a:pPr>
-            <a:r>
-              <a:t>•  Title (prefixed with [Client] if a client is set)</a:t>
-            </a:r>
-          </a:p>
-          <a:p>
-            <a:pPr>
-              <a:spcAft>
-                <a:spcPts val="600"/>
-              </a:spcAft>
-              <a:defRPr sz="1700">
-                <a:solidFill>
-                  <a:srgbClr val="242424"/>
-                </a:solidFill>
-                <a:latin typeface="Segoe UI"/>
-              </a:defRPr>
-            </a:pPr>
-            <a:r>
-              <a:t>•  Colored chips for tags</a:t>
-            </a:r>
-          </a:p>
-          <a:p>
-            <a:pPr>
-              <a:spcAft>
-                <a:spcPts val="600"/>
-              </a:spcAft>
-              <a:defRPr sz="1700">
-                <a:solidFill>
-                  <a:srgbClr val="242424"/>
-                </a:solidFill>
-                <a:latin typeface="Segoe UI"/>
-              </a:defRPr>
-            </a:pPr>
-            <a:r>
-              <a:t>•  Outlined dashed chip for the client (click to filter)</a:t>
-            </a:r>
-          </a:p>
-          <a:p>
-            <a:pPr>
-              <a:spcAft>
-                <a:spcPts val="600"/>
-              </a:spcAft>
-              <a:defRPr sz="1700">
-                <a:solidFill>
-                  <a:srgbClr val="242424"/>
-                </a:solidFill>
-                <a:latin typeface="Segoe UI"/>
-              </a:defRPr>
-            </a:pPr>
-            <a:r>
-              <a:t>•  Time, with a custom lead-time badge if set</a:t>
-            </a:r>
-          </a:p>
-          <a:p>
-            <a:pPr>
-              <a:spcAft>
-                <a:spcPts val="600"/>
-              </a:spcAft>
-              <a:defRPr sz="1700">
-                <a:solidFill>
-                  <a:srgbClr val="242424"/>
-                </a:solidFill>
-                <a:latin typeface="Segoe UI"/>
-              </a:defRPr>
-            </a:pPr>
-            <a:r>
-              <a:t>•  ⋯ menu for row options (lead time + details textarea)</a:t>
-            </a:r>
-          </a:p>
-          <a:p>
-            <a:pPr>
-              <a:spcAft>
-                <a:spcPts val="600"/>
-              </a:spcAft>
-              <a:defRPr sz="1700">
-                <a:solidFill>
-                  <a:srgbClr val="242424"/>
-                </a:solidFill>
-                <a:latin typeface="Segoe UI"/>
-              </a:defRPr>
-            </a:pPr>
-          </a:p>
-          <a:p>
-            <a:pPr>
-              <a:spcAft>
-                <a:spcPts val="600"/>
-              </a:spcAft>
-              <a:defRPr sz="1700">
-                <a:solidFill>
-                  <a:srgbClr val="242424"/>
-                </a:solidFill>
-                <a:latin typeface="Segoe UI"/>
-              </a:defRPr>
-            </a:pPr>
-            <a:r>
-              <a:t>Click any title, date, time, or chip to inline-edit.</a:t>
-            </a:r>
-          </a:p>
-          <a:p>
-            <a:pPr>
-              <a:spcAft>
-                <a:spcPts val="600"/>
-              </a:spcAft>
-              <a:defRPr sz="1700">
-                <a:solidFill>
-                  <a:srgbClr val="242424"/>
-                </a:solidFill>
-                <a:latin typeface="Segoe UI"/>
-              </a:defRPr>
-            </a:pPr>
-            <a:r>
-              <a:t>Enter saves, Esc cancels.</a:t>
-            </a:r>
-          </a:p>
-        </p:txBody>
-      </p:sp>
-      <p:pic>
-        <p:nvPicPr>
-          <p:cNvPr id="4" name="Picture 3" descr="03-lines-view.png"/>
-          <p:cNvPicPr>
-            <a:picLocks noChangeAspect="1"/>
-          </p:cNvPicPr>
-          <p:nvPr/>
-        </p:nvPicPr>
-        <p:blipFill>
-          <a:blip r:embed="rId2"/>
-          <a:stretch>
-            <a:fillRect/>
-          </a:stretch>
-        </p:blipFill>
-        <p:spPr>
-          <a:xfrm>
-            <a:off x="5486400" y="1811807"/>
-            <a:ext cx="6245352" cy="3783026"/>
-          </a:xfrm>
-          <a:prstGeom prst="rect">
-            <a:avLst/>
-          </a:prstGeom>
-        </p:spPr>
-      </p:pic>
+              <a:t>1</a:t>
+            </a:r>
+          </a:p>
+        </p:txBody>
+      </p:sp>
       <p:sp>
         <p:nvSpPr>
           <p:cNvPr id="5" name="TextBox 4"/>
@@ -4414,8 +3997,8 @@
         </p:nvSpPr>
         <p:spPr>
           <a:xfrm>
-            <a:off x="457200" y="6446520"/>
-            <a:ext cx="11277295" cy="320040"/>
+            <a:off x="1325880" y="1783080"/>
+            <a:ext cx="2768498" cy="548640"/>
           </a:xfrm>
           <a:prstGeom prst="rect">
             <a:avLst/>
@@ -4423,15 +4006,468 @@
           <a:noFill/>
         </p:spPr>
         <p:txBody>
-          <a:bodyPr wrap="none">
+          <a:bodyPr wrap="square" anchor="ctr">
             <a:spAutoFit/>
           </a:bodyPr>
           <a:lstStyle/>
           <a:p>
+            <a:pPr algn="l">
+              <a:defRPr sz="2200" b="1">
+                <a:solidFill>
+                  <a:srgbClr val="1F2D3D"/>
+                </a:solidFill>
+                <a:latin typeface="Segoe UI"/>
+              </a:defRPr>
+            </a:pPr>
+            <a:r>
+              <a:t>In the tab</a:t>
+            </a:r>
+          </a:p>
+        </p:txBody>
+      </p:sp>
+      <p:sp>
+        <p:nvSpPr>
+          <p:cNvPr id="6" name="TextBox 5"/>
+          <p:cNvSpPr txBox="1"/>
+          <p:nvPr/>
+        </p:nvSpPr>
+        <p:spPr>
+          <a:xfrm>
+            <a:off x="640080" y="2606040"/>
+            <a:ext cx="3454298" cy="457200"/>
+          </a:xfrm>
+          <a:prstGeom prst="rect">
+            <a:avLst/>
+          </a:prstGeom>
+          <a:noFill/>
+        </p:spPr>
+        <p:txBody>
+          <a:bodyPr wrap="square" anchor="t">
+            <a:spAutoFit/>
+          </a:bodyPr>
+          <a:lstStyle/>
+          <a:p>
+            <a:pPr algn="l">
+              <a:defRPr sz="1200" b="1">
+                <a:solidFill>
+                  <a:srgbClr val="38AEEB"/>
+                </a:solidFill>
+                <a:latin typeface="Segoe UI"/>
+              </a:defRPr>
+            </a:pPr>
+            <a:r>
+              <a:t>for thoughtful adding</a:t>
+            </a:r>
+          </a:p>
+        </p:txBody>
+      </p:sp>
+      <p:sp>
+        <p:nvSpPr>
+          <p:cNvPr id="7" name="TextBox 6"/>
+          <p:cNvSpPr txBox="1"/>
+          <p:nvPr/>
+        </p:nvSpPr>
+        <p:spPr>
+          <a:xfrm>
+            <a:off x="640080" y="3154680"/>
+            <a:ext cx="3454298" cy="2926080"/>
+          </a:xfrm>
+          <a:prstGeom prst="rect">
+            <a:avLst/>
+          </a:prstGeom>
+          <a:noFill/>
+        </p:spPr>
+        <p:txBody>
+          <a:bodyPr wrap="square" anchor="t">
+            <a:spAutoFit/>
+          </a:bodyPr>
+          <a:lstStyle/>
+          <a:p>
+            <a:pPr algn="l">
+              <a:defRPr sz="1400" b="0">
+                <a:solidFill>
+                  <a:srgbClr val="1F2D3D"/>
+                </a:solidFill>
+                <a:latin typeface="Segoe UI"/>
+              </a:defRPr>
+            </a:pPr>
+            <a:r>
+              <a:t>Fill the form at the top of the Reminders tab — title, client, date, time, details. Hit Add.</a:t>
+            </a:r>
+          </a:p>
+        </p:txBody>
+      </p:sp>
+      <p:sp>
+        <p:nvSpPr>
+          <p:cNvPr id="8" name="Oval 7"/>
+          <p:cNvSpPr/>
+          <p:nvPr/>
+        </p:nvSpPr>
+        <p:spPr>
+          <a:xfrm>
+            <a:off x="4368698" y="1828800"/>
+            <a:ext cx="502920" cy="502920"/>
+          </a:xfrm>
+          <a:prstGeom prst="ellipse">
+            <a:avLst/>
+          </a:prstGeom>
+          <a:solidFill>
+            <a:srgbClr val="38AEEB"/>
+          </a:solidFill>
+          <a:ln>
+            <a:noFill/>
+          </a:ln>
+        </p:spPr>
+        <p:style>
+          <a:lnRef idx="1">
+            <a:schemeClr val="accent1"/>
+          </a:lnRef>
+          <a:fillRef idx="3">
+            <a:schemeClr val="accent1"/>
+          </a:fillRef>
+          <a:effectRef idx="2">
+            <a:schemeClr val="accent1"/>
+          </a:effectRef>
+          <a:fontRef idx="minor">
+            <a:schemeClr val="lt1"/>
+          </a:fontRef>
+        </p:style>
+        <p:txBody>
+          <a:bodyPr rtlCol="0" anchor="ctr"/>
+          <a:lstStyle/>
+          <a:p>
+            <a:pPr algn="ctr">
+              <a:defRPr sz="2000" b="1">
+                <a:solidFill>
+                  <a:srgbClr val="FFFFFF"/>
+                </a:solidFill>
+                <a:latin typeface="Segoe UI"/>
+              </a:defRPr>
+            </a:pPr>
+            <a:r>
+              <a:t>2</a:t>
+            </a:r>
+          </a:p>
+        </p:txBody>
+      </p:sp>
+      <p:sp>
+        <p:nvSpPr>
+          <p:cNvPr id="9" name="TextBox 8"/>
+          <p:cNvSpPr txBox="1"/>
+          <p:nvPr/>
+        </p:nvSpPr>
+        <p:spPr>
+          <a:xfrm>
+            <a:off x="5054498" y="1783080"/>
+            <a:ext cx="2768498" cy="548640"/>
+          </a:xfrm>
+          <a:prstGeom prst="rect">
+            <a:avLst/>
+          </a:prstGeom>
+          <a:noFill/>
+        </p:spPr>
+        <p:txBody>
+          <a:bodyPr wrap="square" anchor="ctr">
+            <a:spAutoFit/>
+          </a:bodyPr>
+          <a:lstStyle/>
+          <a:p>
+            <a:pPr algn="l">
+              <a:defRPr sz="2200" b="1">
+                <a:solidFill>
+                  <a:srgbClr val="1F2D3D"/>
+                </a:solidFill>
+                <a:latin typeface="Segoe UI"/>
+              </a:defRPr>
+            </a:pPr>
+            <a:r>
+              <a:t>Mid-conversation</a:t>
+            </a:r>
+          </a:p>
+        </p:txBody>
+      </p:sp>
+      <p:sp>
+        <p:nvSpPr>
+          <p:cNvPr id="10" name="TextBox 9"/>
+          <p:cNvSpPr txBox="1"/>
+          <p:nvPr/>
+        </p:nvSpPr>
+        <p:spPr>
+          <a:xfrm>
+            <a:off x="4368698" y="2606040"/>
+            <a:ext cx="3454298" cy="457200"/>
+          </a:xfrm>
+          <a:prstGeom prst="rect">
+            <a:avLst/>
+          </a:prstGeom>
+          <a:noFill/>
+        </p:spPr>
+        <p:txBody>
+          <a:bodyPr wrap="square" anchor="t">
+            <a:spAutoFit/>
+          </a:bodyPr>
+          <a:lstStyle/>
+          <a:p>
+            <a:pPr algn="l">
+              <a:defRPr sz="1200" b="1">
+                <a:solidFill>
+                  <a:srgbClr val="38AEEB"/>
+                </a:solidFill>
+                <a:latin typeface="Segoe UI"/>
+              </a:defRPr>
+            </a:pPr>
+            <a:r>
+              <a:t>for when you remember while replying</a:t>
+            </a:r>
+          </a:p>
+        </p:txBody>
+      </p:sp>
+      <p:sp>
+        <p:nvSpPr>
+          <p:cNvPr id="11" name="TextBox 10"/>
+          <p:cNvSpPr txBox="1"/>
+          <p:nvPr/>
+        </p:nvSpPr>
+        <p:spPr>
+          <a:xfrm>
+            <a:off x="4368698" y="3154680"/>
+            <a:ext cx="3454298" cy="2926080"/>
+          </a:xfrm>
+          <a:prstGeom prst="rect">
+            <a:avLst/>
+          </a:prstGeom>
+          <a:noFill/>
+        </p:spPr>
+        <p:txBody>
+          <a:bodyPr wrap="square" anchor="t">
+            <a:spAutoFit/>
+          </a:bodyPr>
+          <a:lstStyle/>
+          <a:p>
+            <a:pPr algn="l">
+              <a:defRPr sz="1400" b="0">
+                <a:solidFill>
+                  <a:srgbClr val="1F2D3D"/>
+                </a:solidFill>
+                <a:latin typeface="Segoe UI"/>
+              </a:defRPr>
+            </a:pPr>
+            <a:r>
+              <a:t>Click the · · · under any Teams message box → Day Reminders → Quick add reminder. Type, submit, back to your reply.</a:t>
+            </a:r>
+          </a:p>
+        </p:txBody>
+      </p:sp>
+      <p:sp>
+        <p:nvSpPr>
+          <p:cNvPr id="12" name="Oval 11"/>
+          <p:cNvSpPr/>
+          <p:nvPr/>
+        </p:nvSpPr>
+        <p:spPr>
+          <a:xfrm>
+            <a:off x="8097316" y="1828800"/>
+            <a:ext cx="502920" cy="502920"/>
+          </a:xfrm>
+          <a:prstGeom prst="ellipse">
+            <a:avLst/>
+          </a:prstGeom>
+          <a:solidFill>
+            <a:srgbClr val="38AEEB"/>
+          </a:solidFill>
+          <a:ln>
+            <a:noFill/>
+          </a:ln>
+        </p:spPr>
+        <p:style>
+          <a:lnRef idx="1">
+            <a:schemeClr val="accent1"/>
+          </a:lnRef>
+          <a:fillRef idx="3">
+            <a:schemeClr val="accent1"/>
+          </a:fillRef>
+          <a:effectRef idx="2">
+            <a:schemeClr val="accent1"/>
+          </a:effectRef>
+          <a:fontRef idx="minor">
+            <a:schemeClr val="lt1"/>
+          </a:fontRef>
+        </p:style>
+        <p:txBody>
+          <a:bodyPr rtlCol="0" anchor="ctr"/>
+          <a:lstStyle/>
+          <a:p>
+            <a:pPr algn="ctr">
+              <a:defRPr sz="2000" b="1">
+                <a:solidFill>
+                  <a:srgbClr val="FFFFFF"/>
+                </a:solidFill>
+                <a:latin typeface="Segoe UI"/>
+              </a:defRPr>
+            </a:pPr>
+            <a:r>
+              <a:t>3</a:t>
+            </a:r>
+          </a:p>
+        </p:txBody>
+      </p:sp>
+      <p:sp>
+        <p:nvSpPr>
+          <p:cNvPr id="13" name="TextBox 12"/>
+          <p:cNvSpPr txBox="1"/>
+          <p:nvPr/>
+        </p:nvSpPr>
+        <p:spPr>
+          <a:xfrm>
+            <a:off x="8783116" y="1783080"/>
+            <a:ext cx="2768498" cy="548640"/>
+          </a:xfrm>
+          <a:prstGeom prst="rect">
+            <a:avLst/>
+          </a:prstGeom>
+          <a:noFill/>
+        </p:spPr>
+        <p:txBody>
+          <a:bodyPr wrap="square" anchor="ctr">
+            <a:spAutoFit/>
+          </a:bodyPr>
+          <a:lstStyle/>
+          <a:p>
+            <a:pPr algn="l">
+              <a:defRPr sz="2200" b="1">
+                <a:solidFill>
+                  <a:srgbClr val="1F2D3D"/>
+                </a:solidFill>
+                <a:latin typeface="Segoe UI"/>
+              </a:defRPr>
+            </a:pPr>
+            <a:r>
+              <a:t>In the bot chat</a:t>
+            </a:r>
+          </a:p>
+        </p:txBody>
+      </p:sp>
+      <p:sp>
+        <p:nvSpPr>
+          <p:cNvPr id="14" name="TextBox 13"/>
+          <p:cNvSpPr txBox="1"/>
+          <p:nvPr/>
+        </p:nvSpPr>
+        <p:spPr>
+          <a:xfrm>
+            <a:off x="8097316" y="2606040"/>
+            <a:ext cx="3454298" cy="457200"/>
+          </a:xfrm>
+          <a:prstGeom prst="rect">
+            <a:avLst/>
+          </a:prstGeom>
+          <a:noFill/>
+        </p:spPr>
+        <p:txBody>
+          <a:bodyPr wrap="square" anchor="t">
+            <a:spAutoFit/>
+          </a:bodyPr>
+          <a:lstStyle/>
+          <a:p>
+            <a:pPr algn="l">
+              <a:defRPr sz="1200" b="1">
+                <a:solidFill>
+                  <a:srgbClr val="38AEEB"/>
+                </a:solidFill>
+                <a:latin typeface="Segoe UI"/>
+              </a:defRPr>
+            </a:pPr>
+            <a:r>
+              <a:t>for typing-fast moments</a:t>
+            </a:r>
+          </a:p>
+        </p:txBody>
+      </p:sp>
+      <p:sp>
+        <p:nvSpPr>
+          <p:cNvPr id="15" name="TextBox 14"/>
+          <p:cNvSpPr txBox="1"/>
+          <p:nvPr/>
+        </p:nvSpPr>
+        <p:spPr>
+          <a:xfrm>
+            <a:off x="8097316" y="3154680"/>
+            <a:ext cx="3454298" cy="2926080"/>
+          </a:xfrm>
+          <a:prstGeom prst="rect">
+            <a:avLst/>
+          </a:prstGeom>
+          <a:noFill/>
+        </p:spPr>
+        <p:txBody>
+          <a:bodyPr wrap="square" anchor="t">
+            <a:spAutoFit/>
+          </a:bodyPr>
+          <a:lstStyle/>
+          <a:p>
+            <a:pPr algn="l">
+              <a:defRPr sz="1400" b="0">
+                <a:solidFill>
+                  <a:srgbClr val="1F2D3D"/>
+                </a:solidFill>
+                <a:latin typeface="Segoe UI"/>
+              </a:defRPr>
+            </a:pPr>
+            <a:r>
+              <a:t>/add 5pm tomorrow #qc Review batch 14</a:t>
+            </a:r>
+          </a:p>
+          <a:p>
+            <a:pPr algn="l">
+              <a:defRPr sz="1400" b="0">
+                <a:solidFill>
+                  <a:srgbClr val="1F2D3D"/>
+                </a:solidFill>
+                <a:latin typeface="Segoe UI"/>
+              </a:defRPr>
+            </a:pPr>
+          </a:p>
+          <a:p>
+            <a:pPr algn="l">
+              <a:defRPr sz="1400" b="0">
+                <a:solidFill>
+                  <a:srgbClr val="1F2D3D"/>
+                </a:solidFill>
+                <a:latin typeface="Segoe UI"/>
+              </a:defRPr>
+            </a:pPr>
+            <a:r>
+              <a:t>Dates can be tomorrow, mon, fri, 6/20, or a full YYYY-MM-DD.</a:t>
+            </a:r>
+          </a:p>
+        </p:txBody>
+      </p:sp>
+      <p:sp>
+        <p:nvSpPr>
+          <p:cNvPr id="16" name="TextBox 15"/>
+          <p:cNvSpPr txBox="1"/>
+          <p:nvPr/>
+        </p:nvSpPr>
+        <p:spPr>
+          <a:xfrm>
+            <a:off x="457200" y="6492240"/>
+            <a:ext cx="11277295" cy="274320"/>
+          </a:xfrm>
+          <a:prstGeom prst="rect">
+            <a:avLst/>
+          </a:prstGeom>
+          <a:noFill/>
+        </p:spPr>
+        <p:txBody>
+          <a:bodyPr wrap="square" anchor="t">
+            <a:spAutoFit/>
+          </a:bodyPr>
+          <a:lstStyle/>
+          <a:p>
             <a:pPr algn="r">
-              <a:defRPr sz="1000">
-                <a:solidFill>
-                  <a:srgbClr val="616161"/>
+              <a:defRPr sz="900" b="0">
+                <a:solidFill>
+                  <a:srgbClr val="708095"/>
                 </a:solidFill>
                 <a:latin typeface="Segoe UI"/>
               </a:defRPr>
@@ -4462,14 +4498,50 @@
       <p:grpSpPr/>
       <p:sp>
         <p:nvSpPr>
-          <p:cNvPr id="2" name="Rectangle 1"/>
+          <p:cNvPr id="2" name="TextBox 1"/>
+          <p:cNvSpPr txBox="1"/>
+          <p:nvPr/>
+        </p:nvSpPr>
+        <p:spPr>
+          <a:xfrm>
+            <a:off x="640080" y="502920"/>
+            <a:ext cx="10911535" cy="731520"/>
+          </a:xfrm>
+          <a:prstGeom prst="rect">
+            <a:avLst/>
+          </a:prstGeom>
+          <a:noFill/>
+        </p:spPr>
+        <p:txBody>
+          <a:bodyPr wrap="square" anchor="t">
+            <a:spAutoFit/>
+          </a:bodyPr>
+          <a:lstStyle/>
+          <a:p>
+            <a:pPr algn="l">
+              <a:defRPr sz="3000" b="1">
+                <a:solidFill>
+                  <a:srgbClr val="1F2D3D"/>
+                </a:solidFill>
+                <a:latin typeface="Segoe UI"/>
+              </a:defRPr>
+            </a:pPr>
+            <a:r>
+              <a:t>Am I bombarded this week, or free?</a:t>
+            </a:r>
+          </a:p>
+        </p:txBody>
+      </p:sp>
+      <p:sp>
+        <p:nvSpPr>
+          <p:cNvPr id="3" name="Rectangle 2"/>
           <p:cNvSpPr/>
           <p:nvPr/>
         </p:nvSpPr>
         <p:spPr>
           <a:xfrm>
-            <a:off x="0" y="0"/>
-            <a:ext cx="12191695" cy="822960"/>
+            <a:off x="640080" y="1143000"/>
+            <a:ext cx="502920" cy="54864"/>
           </a:xfrm>
           <a:prstGeom prst="rect">
             <a:avLst/>
@@ -4496,162 +4568,10 @@
           </a:fontRef>
         </p:style>
         <p:txBody>
-          <a:bodyPr rtlCol="0" anchor="ctr" lIns="457200" rIns="457200" tIns="137160" bIns="137160"/>
-          <a:lstStyle/>
-          <a:p>
-            <a:pPr algn="ctr">
-              <a:defRPr sz="2800" b="1">
-                <a:solidFill>
-                  <a:srgbClr val="FFFFFF"/>
-                </a:solidFill>
-                <a:latin typeface="Segoe UI"/>
-              </a:defRPr>
-            </a:pPr>
-            <a:r>
-              <a:t>Week view — am I bombarded or free?</a:t>
-            </a:r>
-          </a:p>
-        </p:txBody>
-      </p:sp>
-      <p:sp>
-        <p:nvSpPr>
-          <p:cNvPr id="3" name="TextBox 2"/>
-          <p:cNvSpPr txBox="1"/>
-          <p:nvPr/>
-        </p:nvSpPr>
-        <p:spPr>
-          <a:xfrm>
-            <a:off x="457200" y="1188720"/>
-            <a:ext cx="4846320" cy="5029200"/>
-          </a:xfrm>
-          <a:prstGeom prst="rect">
-            <a:avLst/>
-          </a:prstGeom>
-          <a:noFill/>
-        </p:spPr>
-        <p:txBody>
-          <a:bodyPr wrap="square">
-            <a:spAutoFit/>
-          </a:bodyPr>
-          <a:lstStyle/>
-          <a:p>
-            <a:pPr>
-              <a:spcAft>
-                <a:spcPts val="600"/>
-              </a:spcAft>
-              <a:defRPr sz="1700">
-                <a:solidFill>
-                  <a:srgbClr val="242424"/>
-                </a:solidFill>
-                <a:latin typeface="Segoe UI"/>
-              </a:defRPr>
-            </a:pPr>
-            <a:r>
-              <a:t>For the moment when you need to know what your whole week looks like.</a:t>
-            </a:r>
-          </a:p>
-          <a:p>
-            <a:pPr>
-              <a:spcAft>
-                <a:spcPts val="600"/>
-              </a:spcAft>
-              <a:defRPr sz="1700">
-                <a:solidFill>
-                  <a:srgbClr val="242424"/>
-                </a:solidFill>
-                <a:latin typeface="Segoe UI"/>
-              </a:defRPr>
-            </a:pPr>
-          </a:p>
-          <a:p>
-            <a:pPr>
-              <a:spcAft>
-                <a:spcPts val="600"/>
-              </a:spcAft>
-              <a:defRPr sz="1700">
-                <a:solidFill>
-                  <a:srgbClr val="242424"/>
-                </a:solidFill>
-                <a:latin typeface="Segoe UI"/>
-              </a:defRPr>
-            </a:pPr>
-            <a:r>
-              <a:t>Mon–Sun grid by due date. Today's column highlighted.</a:t>
-            </a:r>
-          </a:p>
-          <a:p>
-            <a:pPr>
-              <a:spcAft>
-                <a:spcPts val="600"/>
-              </a:spcAft>
-              <a:defRPr sz="1700">
-                <a:solidFill>
-                  <a:srgbClr val="242424"/>
-                </a:solidFill>
-                <a:latin typeface="Segoe UI"/>
-              </a:defRPr>
-            </a:pPr>
-            <a:r>
-              <a:t>Timed items stack by time within each day; anytime items at the bottom.</a:t>
-            </a:r>
-          </a:p>
-          <a:p>
-            <a:pPr>
-              <a:spcAft>
-                <a:spcPts val="600"/>
-              </a:spcAft>
-              <a:defRPr sz="1700">
-                <a:solidFill>
-                  <a:srgbClr val="242424"/>
-                </a:solidFill>
-                <a:latin typeface="Segoe UI"/>
-              </a:defRPr>
-            </a:pPr>
-          </a:p>
-          <a:p>
-            <a:pPr>
-              <a:spcAft>
-                <a:spcPts val="600"/>
-              </a:spcAft>
-              <a:defRPr sz="1700">
-                <a:solidFill>
-                  <a:srgbClr val="242424"/>
-                </a:solidFill>
-                <a:latin typeface="Segoe UI"/>
-              </a:defRPr>
-            </a:pPr>
-            <a:r>
-              <a:t>Click any empty day to start adding a reminder for that date.</a:t>
-            </a:r>
-          </a:p>
-          <a:p>
-            <a:pPr>
-              <a:spcAft>
-                <a:spcPts val="600"/>
-              </a:spcAft>
-              <a:defRPr sz="1700">
-                <a:solidFill>
-                  <a:srgbClr val="242424"/>
-                </a:solidFill>
-                <a:latin typeface="Segoe UI"/>
-              </a:defRPr>
-            </a:pPr>
-          </a:p>
-          <a:p>
-            <a:pPr>
-              <a:spcAft>
-                <a:spcPts val="600"/>
-              </a:spcAft>
-              <a:defRPr sz="1700">
-                <a:solidFill>
-                  <a:srgbClr val="242424"/>
-                </a:solidFill>
-                <a:latin typeface="Segoe UI"/>
-              </a:defRPr>
-            </a:pPr>
-            <a:r>
-              <a:t>Prev / Today / Next to navigate weeks. Mini Day ⇄ Week switcher in the header so you don't have to go back to the top bar to flip.</a:t>
-            </a:r>
+          <a:bodyPr rtlCol="0" anchor="ctr"/>
+          <a:lstStyle/>
+          <a:p>
+            <a:pPr algn="ctr"/>
           </a:p>
         </p:txBody>
       </p:sp>
@@ -4671,8 +4591,8 @@
         </p:blipFill>
         <p:spPr>
           <a:xfrm>
-            <a:off x="5486400" y="1811807"/>
-            <a:ext cx="6245352" cy="3783026"/>
+            <a:off x="2435136" y="1508760"/>
+            <a:ext cx="7321422" cy="4434840"/>
           </a:xfrm>
           <a:prstGeom prst="rect">
             <a:avLst/>
@@ -4687,8 +4607,8 @@
         </p:nvSpPr>
         <p:spPr>
           <a:xfrm>
-            <a:off x="457200" y="6446520"/>
-            <a:ext cx="11277295" cy="320040"/>
+            <a:off x="640080" y="6080760"/>
+            <a:ext cx="10911535" cy="457200"/>
           </a:xfrm>
           <a:prstGeom prst="rect">
             <a:avLst/>
@@ -4696,15 +4616,51 @@
           <a:noFill/>
         </p:spPr>
         <p:txBody>
-          <a:bodyPr wrap="none">
+          <a:bodyPr wrap="square" anchor="t">
             <a:spAutoFit/>
           </a:bodyPr>
           <a:lstStyle/>
           <a:p>
+            <a:pPr algn="ctr">
+              <a:defRPr sz="1400" b="0">
+                <a:solidFill>
+                  <a:srgbClr val="708095"/>
+                </a:solidFill>
+                <a:latin typeface="Segoe UI"/>
+              </a:defRPr>
+            </a:pPr>
+            <a:r>
+              <a:t>Mon–Sun grid by due date. Today's column highlighted. Click any empty day to add for that date.</a:t>
+            </a:r>
+          </a:p>
+        </p:txBody>
+      </p:sp>
+      <p:sp>
+        <p:nvSpPr>
+          <p:cNvPr id="6" name="TextBox 5"/>
+          <p:cNvSpPr txBox="1"/>
+          <p:nvPr/>
+        </p:nvSpPr>
+        <p:spPr>
+          <a:xfrm>
+            <a:off x="457200" y="6492240"/>
+            <a:ext cx="11277295" cy="274320"/>
+          </a:xfrm>
+          <a:prstGeom prst="rect">
+            <a:avLst/>
+          </a:prstGeom>
+          <a:noFill/>
+        </p:spPr>
+        <p:txBody>
+          <a:bodyPr wrap="square" anchor="t">
+            <a:spAutoFit/>
+          </a:bodyPr>
+          <a:lstStyle/>
+          <a:p>
             <a:pPr algn="r">
-              <a:defRPr sz="1000">
-                <a:solidFill>
-                  <a:srgbClr val="616161"/>
+              <a:defRPr sz="900" b="0">
+                <a:solidFill>
+                  <a:srgbClr val="708095"/>
                 </a:solidFill>
                 <a:latin typeface="Segoe UI"/>
               </a:defRPr>
@@ -4735,14 +4691,50 @@
       <p:grpSpPr/>
       <p:sp>
         <p:nvSpPr>
-          <p:cNvPr id="2" name="Rectangle 1"/>
+          <p:cNvPr id="2" name="TextBox 1"/>
+          <p:cNvSpPr txBox="1"/>
+          <p:nvPr/>
+        </p:nvSpPr>
+        <p:spPr>
+          <a:xfrm>
+            <a:off x="640080" y="502920"/>
+            <a:ext cx="10911535" cy="731520"/>
+          </a:xfrm>
+          <a:prstGeom prst="rect">
+            <a:avLst/>
+          </a:prstGeom>
+          <a:noFill/>
+        </p:spPr>
+        <p:txBody>
+          <a:bodyPr wrap="square" anchor="t">
+            <a:spAutoFit/>
+          </a:bodyPr>
+          <a:lstStyle/>
+          <a:p>
+            <a:pPr algn="l">
+              <a:defRPr sz="3000" b="1">
+                <a:solidFill>
+                  <a:srgbClr val="1F2D3D"/>
+                </a:solidFill>
+                <a:latin typeface="Segoe UI"/>
+              </a:defRPr>
+            </a:pPr>
+            <a:r>
+              <a:t>Group by client. Or tag. Or just leave it flat.</a:t>
+            </a:r>
+          </a:p>
+        </p:txBody>
+      </p:sp>
+      <p:sp>
+        <p:nvSpPr>
+          <p:cNvPr id="3" name="Rectangle 2"/>
           <p:cNvSpPr/>
           <p:nvPr/>
         </p:nvSpPr>
         <p:spPr>
           <a:xfrm>
-            <a:off x="0" y="0"/>
-            <a:ext cx="12191695" cy="822960"/>
+            <a:off x="640080" y="1143000"/>
+            <a:ext cx="502920" cy="54864"/>
           </a:xfrm>
           <a:prstGeom prst="rect">
             <a:avLst/>
@@ -4769,210 +4761,10 @@
           </a:fontRef>
         </p:style>
         <p:txBody>
-          <a:bodyPr rtlCol="0" anchor="ctr" lIns="457200" rIns="457200" tIns="137160" bIns="137160"/>
-          <a:lstStyle/>
-          <a:p>
-            <a:pPr algn="ctr">
-              <a:defRPr sz="2800" b="1">
-                <a:solidFill>
-                  <a:srgbClr val="FFFFFF"/>
-                </a:solidFill>
-                <a:latin typeface="Segoe UI"/>
-              </a:defRPr>
-            </a:pPr>
-            <a:r>
-              <a:t>Organize — tags, clients, group, filter</a:t>
-            </a:r>
-          </a:p>
-        </p:txBody>
-      </p:sp>
-      <p:sp>
-        <p:nvSpPr>
-          <p:cNvPr id="3" name="TextBox 2"/>
-          <p:cNvSpPr txBox="1"/>
-          <p:nvPr/>
-        </p:nvSpPr>
-        <p:spPr>
-          <a:xfrm>
-            <a:off x="457200" y="1188720"/>
-            <a:ext cx="4846320" cy="5029200"/>
-          </a:xfrm>
-          <a:prstGeom prst="rect">
-            <a:avLst/>
-          </a:prstGeom>
-          <a:noFill/>
-        </p:spPr>
-        <p:txBody>
-          <a:bodyPr wrap="square">
-            <a:spAutoFit/>
-          </a:bodyPr>
-          <a:lstStyle/>
-          <a:p>
-            <a:pPr>
-              <a:spcAft>
-                <a:spcPts val="600"/>
-              </a:spcAft>
-              <a:defRPr sz="1700">
-                <a:solidFill>
-                  <a:srgbClr val="242424"/>
-                </a:solidFill>
-                <a:latin typeface="Segoe UI"/>
-              </a:defRPr>
-            </a:pPr>
-            <a:r>
-              <a:t>Tags — type #work, #urgent, #qc directly in the title. Colored chips, click to filter.</a:t>
-            </a:r>
-          </a:p>
-          <a:p>
-            <a:pPr>
-              <a:spcAft>
-                <a:spcPts val="600"/>
-              </a:spcAft>
-              <a:defRPr sz="1700">
-                <a:solidFill>
-                  <a:srgbClr val="242424"/>
-                </a:solidFill>
-                <a:latin typeface="Segoe UI"/>
-              </a:defRPr>
-            </a:pPr>
-          </a:p>
-          <a:p>
-            <a:pPr>
-              <a:spcAft>
-                <a:spcPts val="600"/>
-              </a:spcAft>
-              <a:defRPr sz="1700">
-                <a:solidFill>
-                  <a:srgbClr val="242424"/>
-                </a:solidFill>
-                <a:latin typeface="Segoe UI"/>
-              </a:defRPr>
-            </a:pPr>
-            <a:r>
-              <a:t>Clients — set per reminder. Title shows as [Client] prefix everywhere.</a:t>
-            </a:r>
-          </a:p>
-          <a:p>
-            <a:pPr>
-              <a:spcAft>
-                <a:spcPts val="600"/>
-              </a:spcAft>
-              <a:defRPr sz="1700">
-                <a:solidFill>
-                  <a:srgbClr val="242424"/>
-                </a:solidFill>
-                <a:latin typeface="Segoe UI"/>
-              </a:defRPr>
-            </a:pPr>
-            <a:r>
-              <a:t>    Colored per client (deterministic — same client = same color across rows).</a:t>
-            </a:r>
-          </a:p>
-          <a:p>
-            <a:pPr>
-              <a:spcAft>
-                <a:spcPts val="600"/>
-              </a:spcAft>
-              <a:defRPr sz="1700">
-                <a:solidFill>
-                  <a:srgbClr val="242424"/>
-                </a:solidFill>
-                <a:latin typeface="Segoe UI"/>
-              </a:defRPr>
-            </a:pPr>
-            <a:r>
-              <a:t>    Click chip to filter; Shift+click or right-click to inline-edit.</a:t>
-            </a:r>
-          </a:p>
-          <a:p>
-            <a:pPr>
-              <a:spcAft>
-                <a:spcPts val="600"/>
-              </a:spcAft>
-              <a:defRPr sz="1700">
-                <a:solidFill>
-                  <a:srgbClr val="242424"/>
-                </a:solidFill>
-                <a:latin typeface="Segoe UI"/>
-              </a:defRPr>
-            </a:pPr>
-          </a:p>
-          <a:p>
-            <a:pPr>
-              <a:spcAft>
-                <a:spcPts val="600"/>
-              </a:spcAft>
-              <a:defRPr sz="1700">
-                <a:solidFill>
-                  <a:srgbClr val="242424"/>
-                </a:solidFill>
-                <a:latin typeface="Segoe UI"/>
-              </a:defRPr>
-            </a:pPr>
-            <a:r>
-              <a:t>Group toggle — cycles off → tag → client → off (shortcut: g).</a:t>
-            </a:r>
-          </a:p>
-          <a:p>
-            <a:pPr>
-              <a:spcAft>
-                <a:spcPts val="600"/>
-              </a:spcAft>
-              <a:defRPr sz="1700">
-                <a:solidFill>
-                  <a:srgbClr val="242424"/>
-                </a:solidFill>
-                <a:latin typeface="Segoe UI"/>
-              </a:defRPr>
-            </a:pPr>
-            <a:r>
-              <a:t>    Sections per tag or per client, each header colored to match.</a:t>
-            </a:r>
-          </a:p>
-          <a:p>
-            <a:pPr>
-              <a:spcAft>
-                <a:spcPts val="600"/>
-              </a:spcAft>
-              <a:defRPr sz="1700">
-                <a:solidFill>
-                  <a:srgbClr val="242424"/>
-                </a:solidFill>
-                <a:latin typeface="Segoe UI"/>
-              </a:defRPr>
-            </a:pPr>
-          </a:p>
-          <a:p>
-            <a:pPr>
-              <a:spcAft>
-                <a:spcPts val="600"/>
-              </a:spcAft>
-              <a:defRPr sz="1700">
-                <a:solidFill>
-                  <a:srgbClr val="242424"/>
-                </a:solidFill>
-                <a:latin typeface="Segoe UI"/>
-              </a:defRPr>
-            </a:pPr>
-            <a:r>
-              <a:t>Quick filters — All / Timed / Anytime / Priority / Done pills above the list.</a:t>
-            </a:r>
-          </a:p>
-          <a:p>
-            <a:pPr>
-              <a:spcAft>
-                <a:spcPts val="600"/>
-              </a:spcAft>
-              <a:defRPr sz="1700">
-                <a:solidFill>
-                  <a:srgbClr val="242424"/>
-                </a:solidFill>
-                <a:latin typeface="Segoe UI"/>
-              </a:defRPr>
-            </a:pPr>
-            <a:r>
-              <a:t>    Search box top-right (shortcut: f) matches title, tags, and client.</a:t>
-            </a:r>
+          <a:bodyPr rtlCol="0" anchor="ctr"/>
+          <a:lstStyle/>
+          <a:p>
+            <a:pPr algn="ctr"/>
           </a:p>
         </p:txBody>
       </p:sp>
@@ -4992,8 +4784,8 @@
         </p:blipFill>
         <p:spPr>
           <a:xfrm>
-            <a:off x="5486400" y="1811807"/>
-            <a:ext cx="6245352" cy="3783026"/>
+            <a:off x="2435136" y="1508760"/>
+            <a:ext cx="7321422" cy="4434840"/>
           </a:xfrm>
           <a:prstGeom prst="rect">
             <a:avLst/>
@@ -5008,8 +4800,8 @@
         </p:nvSpPr>
         <p:spPr>
           <a:xfrm>
-            <a:off x="457200" y="6446520"/>
-            <a:ext cx="11277295" cy="320040"/>
+            <a:off x="640080" y="6080760"/>
+            <a:ext cx="10911535" cy="457200"/>
           </a:xfrm>
           <a:prstGeom prst="rect">
             <a:avLst/>
@@ -5017,15 +4809,51 @@
           <a:noFill/>
         </p:spPr>
         <p:txBody>
-          <a:bodyPr wrap="none">
+          <a:bodyPr wrap="square" anchor="t">
             <a:spAutoFit/>
           </a:bodyPr>
           <a:lstStyle/>
           <a:p>
+            <a:pPr algn="ctr">
+              <a:defRPr sz="1400" b="0">
+                <a:solidFill>
+                  <a:srgbClr val="708095"/>
+                </a:solidFill>
+                <a:latin typeface="Segoe UI"/>
+              </a:defRPr>
+            </a:pPr>
+            <a:r>
+              <a:t>The Group toggle cycles off → tag → client. Sections per group, each header colored to match. Click any chip to filter to just that one.</a:t>
+            </a:r>
+          </a:p>
+        </p:txBody>
+      </p:sp>
+      <p:sp>
+        <p:nvSpPr>
+          <p:cNvPr id="6" name="TextBox 5"/>
+          <p:cNvSpPr txBox="1"/>
+          <p:nvPr/>
+        </p:nvSpPr>
+        <p:spPr>
+          <a:xfrm>
+            <a:off x="457200" y="6492240"/>
+            <a:ext cx="11277295" cy="274320"/>
+          </a:xfrm>
+          <a:prstGeom prst="rect">
+            <a:avLst/>
+          </a:prstGeom>
+          <a:noFill/>
+        </p:spPr>
+        <p:txBody>
+          <a:bodyPr wrap="square" anchor="t">
+            <a:spAutoFit/>
+          </a:bodyPr>
+          <a:lstStyle/>
+          <a:p>
             <a:pPr algn="r">
-              <a:defRPr sz="1000">
-                <a:solidFill>
-                  <a:srgbClr val="616161"/>
+              <a:defRPr sz="900" b="0">
+                <a:solidFill>
+                  <a:srgbClr val="708095"/>
                 </a:solidFill>
                 <a:latin typeface="Segoe UI"/>
               </a:defRPr>
@@ -5056,14 +4884,50 @@
       <p:grpSpPr/>
       <p:sp>
         <p:nvSpPr>
-          <p:cNvPr id="2" name="Rectangle 1"/>
+          <p:cNvPr id="2" name="TextBox 1"/>
+          <p:cNvSpPr txBox="1"/>
+          <p:nvPr/>
+        </p:nvSpPr>
+        <p:spPr>
+          <a:xfrm>
+            <a:off x="640080" y="502920"/>
+            <a:ext cx="10911535" cy="731520"/>
+          </a:xfrm>
+          <a:prstGeom prst="rect">
+            <a:avLst/>
+          </a:prstGeom>
+          <a:noFill/>
+        </p:spPr>
+        <p:txBody>
+          <a:bodyPr wrap="square" anchor="t">
+            <a:spAutoFit/>
+          </a:bodyPr>
+          <a:lstStyle/>
+          <a:p>
+            <a:pPr algn="l">
+              <a:defRPr sz="3000" b="1">
+                <a:solidFill>
+                  <a:srgbClr val="1F2D3D"/>
+                </a:solidFill>
+                <a:latin typeface="Segoe UI"/>
+              </a:defRPr>
+            </a:pPr>
+            <a:r>
+              <a:t>When it's due, a card pops in your chat.</a:t>
+            </a:r>
+          </a:p>
+        </p:txBody>
+      </p:sp>
+      <p:sp>
+        <p:nvSpPr>
+          <p:cNvPr id="3" name="Rectangle 2"/>
           <p:cNvSpPr/>
           <p:nvPr/>
         </p:nvSpPr>
         <p:spPr>
           <a:xfrm>
-            <a:off x="0" y="0"/>
-            <a:ext cx="12191695" cy="822960"/>
+            <a:off x="640080" y="1143000"/>
+            <a:ext cx="502920" cy="54864"/>
           </a:xfrm>
           <a:prstGeom prst="rect">
             <a:avLst/>
@@ -5090,229 +4954,10 @@
           </a:fontRef>
         </p:style>
         <p:txBody>
-          <a:bodyPr rtlCol="0" anchor="ctr" lIns="457200" rIns="457200" tIns="137160" bIns="137160"/>
-          <a:lstStyle/>
-          <a:p>
-            <a:pPr algn="ctr">
-              <a:defRPr sz="2800" b="1">
-                <a:solidFill>
-                  <a:srgbClr val="FFFFFF"/>
-                </a:solidFill>
-                <a:latin typeface="Segoe UI"/>
-              </a:defRPr>
-            </a:pPr>
-            <a:r>
-              <a:t>Notifications — the proactive card</a:t>
-            </a:r>
-          </a:p>
-        </p:txBody>
-      </p:sp>
-      <p:sp>
-        <p:nvSpPr>
-          <p:cNvPr id="3" name="TextBox 2"/>
-          <p:cNvSpPr txBox="1"/>
-          <p:nvPr/>
-        </p:nvSpPr>
-        <p:spPr>
-          <a:xfrm>
-            <a:off x="457200" y="1188720"/>
-            <a:ext cx="4846320" cy="5029200"/>
-          </a:xfrm>
-          <a:prstGeom prst="rect">
-            <a:avLst/>
-          </a:prstGeom>
-          <a:noFill/>
-        </p:spPr>
-        <p:txBody>
-          <a:bodyPr wrap="square">
-            <a:spAutoFit/>
-          </a:bodyPr>
-          <a:lstStyle/>
-          <a:p>
-            <a:pPr>
-              <a:spcAft>
-                <a:spcPts val="600"/>
-              </a:spcAft>
-              <a:defRPr sz="1700">
-                <a:solidFill>
-                  <a:srgbClr val="242424"/>
-                </a:solidFill>
-                <a:latin typeface="Segoe UI"/>
-              </a:defRPr>
-            </a:pPr>
-            <a:r>
-              <a:t>When a timed reminder is due (or N minutes before, configurable):</a:t>
-            </a:r>
-          </a:p>
-          <a:p>
-            <a:pPr>
-              <a:spcAft>
-                <a:spcPts val="600"/>
-              </a:spcAft>
-              <a:defRPr sz="1700">
-                <a:solidFill>
-                  <a:srgbClr val="242424"/>
-                </a:solidFill>
-                <a:latin typeface="Segoe UI"/>
-              </a:defRPr>
-            </a:pPr>
-            <a:r>
-              <a:t>•  A card lands in your Day Reminders chat.</a:t>
-            </a:r>
-          </a:p>
-          <a:p>
-            <a:pPr>
-              <a:spcAft>
-                <a:spcPts val="600"/>
-              </a:spcAft>
-              <a:defRPr sz="1700">
-                <a:solidFill>
-                  <a:srgbClr val="242424"/>
-                </a:solidFill>
-                <a:latin typeface="Segoe UI"/>
-              </a:defRPr>
-            </a:pPr>
-            <a:r>
-              <a:t>•  Buttons: Mark done · Snooze 15m · Snooze 1h · Tomorrow.</a:t>
-            </a:r>
-          </a:p>
-          <a:p>
-            <a:pPr>
-              <a:spcAft>
-                <a:spcPts val="600"/>
-              </a:spcAft>
-              <a:defRPr sz="1700">
-                <a:solidFill>
-                  <a:srgbClr val="242424"/>
-                </a:solidFill>
-                <a:latin typeface="Segoe UI"/>
-              </a:defRPr>
-            </a:pPr>
-            <a:r>
-              <a:t>•  Title shows as [Client] Title; description (if any) appears below.</a:t>
-            </a:r>
-          </a:p>
-          <a:p>
-            <a:pPr>
-              <a:spcAft>
-                <a:spcPts val="600"/>
-              </a:spcAft>
-              <a:defRPr sz="1700">
-                <a:solidFill>
-                  <a:srgbClr val="242424"/>
-                </a:solidFill>
-                <a:latin typeface="Segoe UI"/>
-              </a:defRPr>
-            </a:pPr>
-            <a:r>
-              <a:t>•  Teams Activity Feed (bell icon) also gets a notification.</a:t>
-            </a:r>
-          </a:p>
-          <a:p>
-            <a:pPr>
-              <a:spcAft>
-                <a:spcPts val="600"/>
-              </a:spcAft>
-              <a:defRPr sz="1700">
-                <a:solidFill>
-                  <a:srgbClr val="242424"/>
-                </a:solidFill>
-                <a:latin typeface="Segoe UI"/>
-              </a:defRPr>
-            </a:pPr>
-          </a:p>
-          <a:p>
-            <a:pPr>
-              <a:spcAft>
-                <a:spcPts val="600"/>
-              </a:spcAft>
-              <a:defRPr sz="1700">
-                <a:solidFill>
-                  <a:srgbClr val="242424"/>
-                </a:solidFill>
-                <a:latin typeface="Segoe UI"/>
-              </a:defRPr>
-            </a:pPr>
-            <a:r>
-              <a:t>End-of-day check-in:</a:t>
-            </a:r>
-          </a:p>
-          <a:p>
-            <a:pPr>
-              <a:spcAft>
-                <a:spcPts val="600"/>
-              </a:spcAft>
-              <a:defRPr sz="1700">
-                <a:solidFill>
-                  <a:srgbClr val="242424"/>
-                </a:solidFill>
-                <a:latin typeface="Segoe UI"/>
-              </a:defRPr>
-            </a:pPr>
-            <a:r>
-              <a:t>•  At your configured EOD time the bot posts 'Are you done?' with any open items.</a:t>
-            </a:r>
-          </a:p>
-          <a:p>
-            <a:pPr>
-              <a:spcAft>
-                <a:spcPts val="600"/>
-              </a:spcAft>
-              <a:defRPr sz="1700">
-                <a:solidFill>
-                  <a:srgbClr val="242424"/>
-                </a:solidFill>
-                <a:latin typeface="Segoe UI"/>
-              </a:defRPr>
-            </a:pPr>
-            <a:r>
-              <a:t>•  Buttons to acknowledge or snooze 15 minutes.</a:t>
-            </a:r>
-          </a:p>
-          <a:p>
-            <a:pPr>
-              <a:spcAft>
-                <a:spcPts val="600"/>
-              </a:spcAft>
-              <a:defRPr sz="1700">
-                <a:solidFill>
-                  <a:srgbClr val="242424"/>
-                </a:solidFill>
-                <a:latin typeface="Segoe UI"/>
-              </a:defRPr>
-            </a:pPr>
-          </a:p>
-          <a:p>
-            <a:pPr>
-              <a:spcAft>
-                <a:spcPts val="600"/>
-              </a:spcAft>
-              <a:defRPr sz="1700">
-                <a:solidFill>
-                  <a:srgbClr val="242424"/>
-                </a:solidFill>
-                <a:latin typeface="Segoe UI"/>
-              </a:defRPr>
-            </a:pPr>
-            <a:r>
-              <a:t>Items not done by their due date auto-roll forward to today with an overdue Nd badge</a:t>
-            </a:r>
-          </a:p>
-          <a:p>
-            <a:pPr>
-              <a:spcAft>
-                <a:spcPts val="600"/>
-              </a:spcAft>
-              <a:defRPr sz="1700">
-                <a:solidFill>
-                  <a:srgbClr val="242424"/>
-                </a:solidFill>
-                <a:latin typeface="Segoe UI"/>
-              </a:defRPr>
-            </a:pPr>
-            <a:r>
-              <a:t>(capped at 30 days so old backlog doesn't pile up).</a:t>
-            </a:r>
+          <a:bodyPr rtlCol="0" anchor="ctr"/>
+          <a:lstStyle/>
+          <a:p>
+            <a:pPr algn="ctr"/>
           </a:p>
         </p:txBody>
       </p:sp>
@@ -5332,8 +4977,8 @@
         </p:blipFill>
         <p:spPr>
           <a:xfrm>
-            <a:off x="5486400" y="1811807"/>
-            <a:ext cx="6245352" cy="3783026"/>
+            <a:off x="2435136" y="1508760"/>
+            <a:ext cx="7321422" cy="4434840"/>
           </a:xfrm>
           <a:prstGeom prst="rect">
             <a:avLst/>
@@ -5348,8 +4993,8 @@
         </p:nvSpPr>
         <p:spPr>
           <a:xfrm>
-            <a:off x="457200" y="6446520"/>
-            <a:ext cx="11277295" cy="320040"/>
+            <a:off x="640080" y="6080760"/>
+            <a:ext cx="10911535" cy="457200"/>
           </a:xfrm>
           <a:prstGeom prst="rect">
             <a:avLst/>
@@ -5357,15 +5002,51 @@
           <a:noFill/>
         </p:spPr>
         <p:txBody>
-          <a:bodyPr wrap="none">
+          <a:bodyPr wrap="square" anchor="t">
             <a:spAutoFit/>
           </a:bodyPr>
           <a:lstStyle/>
           <a:p>
+            <a:pPr algn="ctr">
+              <a:defRPr sz="1400" b="0">
+                <a:solidFill>
+                  <a:srgbClr val="708095"/>
+                </a:solidFill>
+                <a:latin typeface="Segoe UI"/>
+              </a:defRPr>
+            </a:pPr>
+            <a:r>
+              <a:t>Mark done. Or snooze 15m, 1h, Tomorrow. End-of-day check-in lists anything still open.</a:t>
+            </a:r>
+          </a:p>
+        </p:txBody>
+      </p:sp>
+      <p:sp>
+        <p:nvSpPr>
+          <p:cNvPr id="6" name="TextBox 5"/>
+          <p:cNvSpPr txBox="1"/>
+          <p:nvPr/>
+        </p:nvSpPr>
+        <p:spPr>
+          <a:xfrm>
+            <a:off x="457200" y="6492240"/>
+            <a:ext cx="11277295" cy="274320"/>
+          </a:xfrm>
+          <a:prstGeom prst="rect">
+            <a:avLst/>
+          </a:prstGeom>
+          <a:noFill/>
+        </p:spPr>
+        <p:txBody>
+          <a:bodyPr wrap="square" anchor="t">
+            <a:spAutoFit/>
+          </a:bodyPr>
+          <a:lstStyle/>
+          <a:p>
             <a:pPr algn="r">
-              <a:defRPr sz="1000">
-                <a:solidFill>
-                  <a:srgbClr val="616161"/>
+              <a:defRPr sz="900" b="0">
+                <a:solidFill>
+                  <a:srgbClr val="708095"/>
                 </a:solidFill>
                 <a:latin typeface="Segoe UI"/>
               </a:defRPr>
@@ -5403,13 +5084,13 @@
         <p:spPr>
           <a:xfrm>
             <a:off x="0" y="0"/>
-            <a:ext cx="12191695" cy="822960"/>
+            <a:ext cx="12191695" cy="6858000"/>
           </a:xfrm>
           <a:prstGeom prst="rect">
             <a:avLst/>
           </a:prstGeom>
           <a:solidFill>
-            <a:srgbClr val="38AEEB"/>
+            <a:srgbClr val="0E1F2E"/>
           </a:solidFill>
           <a:ln>
             <a:noFill/>
@@ -5430,274 +5111,53 @@
           </a:fontRef>
         </p:style>
         <p:txBody>
-          <a:bodyPr rtlCol="0" anchor="ctr" lIns="457200" rIns="457200" tIns="137160" bIns="137160"/>
-          <a:lstStyle/>
-          <a:p>
-            <a:pPr algn="ctr">
-              <a:defRPr sz="2800" b="1">
-                <a:solidFill>
-                  <a:srgbClr val="FFFFFF"/>
-                </a:solidFill>
-                <a:latin typeface="Segoe UI"/>
-              </a:defRPr>
-            </a:pPr>
-            <a:r>
-              <a:t>Tips, shortcuts, what's next</a:t>
-            </a:r>
-          </a:p>
-        </p:txBody>
-      </p:sp>
-      <p:sp>
-        <p:nvSpPr>
-          <p:cNvPr id="3" name="TextBox 2"/>
-          <p:cNvSpPr txBox="1"/>
+          <a:bodyPr rtlCol="0" anchor="ctr"/>
+          <a:lstStyle/>
+          <a:p>
+            <a:pPr algn="ctr"/>
+          </a:p>
+        </p:txBody>
+      </p:sp>
+      <p:sp>
+        <p:nvSpPr>
+          <p:cNvPr id="3" name="Rectangle 2"/>
+          <p:cNvSpPr/>
           <p:nvPr/>
         </p:nvSpPr>
         <p:spPr>
           <a:xfrm>
-            <a:off x="548640" y="1188720"/>
-            <a:ext cx="10972800" cy="5029200"/>
-          </a:xfrm>
-          <a:prstGeom prst="rect">
-            <a:avLst/>
-          </a:prstGeom>
-          <a:noFill/>
-        </p:spPr>
-        <p:txBody>
-          <a:bodyPr wrap="square">
-            <a:spAutoFit/>
-          </a:bodyPr>
-          <a:lstStyle/>
-          <a:p>
-            <a:pPr>
-              <a:spcAft>
-                <a:spcPts val="600"/>
-              </a:spcAft>
-              <a:defRPr sz="1700">
-                <a:solidFill>
-                  <a:srgbClr val="242424"/>
-                </a:solidFill>
-                <a:latin typeface="Segoe UI"/>
-              </a:defRPr>
-            </a:pPr>
-            <a:r>
-              <a:t>Keyboard shortcuts:</a:t>
-            </a:r>
-          </a:p>
-          <a:p>
-            <a:pPr>
-              <a:spcAft>
-                <a:spcPts val="600"/>
-              </a:spcAft>
-              <a:defRPr sz="1700">
-                <a:solidFill>
-                  <a:srgbClr val="242424"/>
-                </a:solidFill>
-                <a:latin typeface="Segoe UI"/>
-              </a:defRPr>
-            </a:pPr>
-            <a:r>
-              <a:t>    /  focus the add field           f  focus search</a:t>
-            </a:r>
-          </a:p>
-          <a:p>
-            <a:pPr>
-              <a:spcAft>
-                <a:spcPts val="600"/>
-              </a:spcAft>
-              <a:defRPr sz="1700">
-                <a:solidFill>
-                  <a:srgbClr val="242424"/>
-                </a:solidFill>
-                <a:latin typeface="Segoe UI"/>
-              </a:defRPr>
-            </a:pPr>
-            <a:r>
-              <a:t>    g  cycle group mode              v  cycle views</a:t>
-            </a:r>
-          </a:p>
-          <a:p>
-            <a:pPr>
-              <a:spcAft>
-                <a:spcPts val="600"/>
-              </a:spcAft>
-              <a:defRPr sz="1700">
-                <a:solidFill>
-                  <a:srgbClr val="242424"/>
-                </a:solidFill>
-                <a:latin typeface="Segoe UI"/>
-              </a:defRPr>
-            </a:pPr>
-            <a:r>
-              <a:t>    ?  open the quick guide          Esc  clear filters / cancel edit</a:t>
-            </a:r>
-          </a:p>
-          <a:p>
-            <a:pPr>
-              <a:spcAft>
-                <a:spcPts val="600"/>
-              </a:spcAft>
-              <a:defRPr sz="1700">
-                <a:solidFill>
-                  <a:srgbClr val="242424"/>
-                </a:solidFill>
-                <a:latin typeface="Segoe UI"/>
-              </a:defRPr>
-            </a:pPr>
-          </a:p>
-          <a:p>
-            <a:pPr>
-              <a:spcAft>
-                <a:spcPts val="600"/>
-              </a:spcAft>
-              <a:defRPr sz="1700">
-                <a:solidFill>
-                  <a:srgbClr val="242424"/>
-                </a:solidFill>
-                <a:latin typeface="Segoe UI"/>
-              </a:defRPr>
-            </a:pPr>
-            <a:r>
-              <a:t>Other handy bits:</a:t>
-            </a:r>
-          </a:p>
-          <a:p>
-            <a:pPr>
-              <a:spcAft>
-                <a:spcPts val="600"/>
-              </a:spcAft>
-              <a:defRPr sz="1700">
-                <a:solidFill>
-                  <a:srgbClr val="242424"/>
-                </a:solidFill>
-                <a:latin typeface="Segoe UI"/>
-              </a:defRPr>
-            </a:pPr>
-            <a:r>
-              <a:t>•  Select multiple — top-bar button, then bulk-done / delete / star a batch.</a:t>
-            </a:r>
-          </a:p>
-          <a:p>
-            <a:pPr>
-              <a:spcAft>
-                <a:spcPts val="600"/>
-              </a:spcAft>
-              <a:defRPr sz="1700">
-                <a:solidFill>
-                  <a:srgbClr val="242424"/>
-                </a:solidFill>
-                <a:latin typeface="Segoe UI"/>
-              </a:defRPr>
-            </a:pPr>
-            <a:r>
-              <a:t>•  Templates — + Templates pill for common reminders, one click to add.</a:t>
-            </a:r>
-          </a:p>
-          <a:p>
-            <a:pPr>
-              <a:spcAft>
-                <a:spcPts val="600"/>
-              </a:spcAft>
-              <a:defRPr sz="1700">
-                <a:solidFill>
-                  <a:srgbClr val="242424"/>
-                </a:solidFill>
-                <a:latin typeface="Segoe UI"/>
-              </a:defRPr>
-            </a:pPr>
-            <a:r>
-              <a:t>•  Undo delete — toast hangs around for 5 seconds after every delete.</a:t>
-            </a:r>
-          </a:p>
-          <a:p>
-            <a:pPr>
-              <a:spcAft>
-                <a:spcPts val="600"/>
-              </a:spcAft>
-              <a:defRPr sz="1700">
-                <a:solidFill>
-                  <a:srgbClr val="242424"/>
-                </a:solidFill>
-                <a:latin typeface="Segoe UI"/>
-              </a:defRPr>
-            </a:pPr>
-            <a:r>
-              <a:t>•  Settings (top-right ⚙) — EOD check-in time, default lead minutes, weekdays-only, theme.</a:t>
-            </a:r>
-          </a:p>
-          <a:p>
-            <a:pPr>
-              <a:spcAft>
-                <a:spcPts val="600"/>
-              </a:spcAft>
-              <a:defRPr sz="1700">
-                <a:solidFill>
-                  <a:srgbClr val="242424"/>
-                </a:solidFill>
-                <a:latin typeface="Segoe UI"/>
-              </a:defRPr>
-            </a:pPr>
-          </a:p>
-          <a:p>
-            <a:pPr>
-              <a:spcAft>
-                <a:spcPts val="600"/>
-              </a:spcAft>
-              <a:defRPr sz="1700">
-                <a:solidFill>
-                  <a:srgbClr val="242424"/>
-                </a:solidFill>
-                <a:latin typeface="Segoe UI"/>
-              </a:defRPr>
-            </a:pPr>
-            <a:r>
-              <a:t>Coming next (v1.5): sharing. Assign reminders to teammates; set per-tag default share lists</a:t>
-            </a:r>
-          </a:p>
-          <a:p>
-            <a:pPr>
-              <a:spcAft>
-                <a:spcPts val="600"/>
-              </a:spcAft>
-              <a:defRPr sz="1700">
-                <a:solidFill>
-                  <a:srgbClr val="242424"/>
-                </a:solidFill>
-                <a:latin typeface="Segoe UI"/>
-              </a:defRPr>
-            </a:pPr>
-            <a:r>
-              <a:t>    so #QC auto-shares with the QC team without picking recipients each time.</a:t>
-            </a:r>
-          </a:p>
-          <a:p>
-            <a:pPr>
-              <a:spcAft>
-                <a:spcPts val="600"/>
-              </a:spcAft>
-              <a:defRPr sz="1700">
-                <a:solidFill>
-                  <a:srgbClr val="242424"/>
-                </a:solidFill>
-                <a:latin typeface="Segoe UI"/>
-              </a:defRPr>
-            </a:pPr>
-          </a:p>
-          <a:p>
-            <a:pPr>
-              <a:spcAft>
-                <a:spcPts val="600"/>
-              </a:spcAft>
-              <a:defRPr sz="1700">
-                <a:solidFill>
-                  <a:srgbClr val="242424"/>
-                </a:solidFill>
-                <a:latin typeface="Segoe UI"/>
-              </a:defRPr>
-            </a:pPr>
-            <a:r>
-              <a:t>Bugs, asks, 'this is annoying' feedback → drop them in the team channel or ping Josh.</a:t>
-            </a:r>
+            <a:off x="914400" y="1051560"/>
+            <a:ext cx="640080" cy="73152"/>
+          </a:xfrm>
+          <a:prstGeom prst="rect">
+            <a:avLst/>
+          </a:prstGeom>
+          <a:solidFill>
+            <a:srgbClr val="38AEEB"/>
+          </a:solidFill>
+          <a:ln>
+            <a:noFill/>
+          </a:ln>
+        </p:spPr>
+        <p:style>
+          <a:lnRef idx="1">
+            <a:schemeClr val="accent1"/>
+          </a:lnRef>
+          <a:fillRef idx="3">
+            <a:schemeClr val="accent1"/>
+          </a:fillRef>
+          <a:effectRef idx="2">
+            <a:schemeClr val="accent1"/>
+          </a:effectRef>
+          <a:fontRef idx="minor">
+            <a:schemeClr val="lt1"/>
+          </a:fontRef>
+        </p:style>
+        <p:txBody>
+          <a:bodyPr rtlCol="0" anchor="ctr"/>
+          <a:lstStyle/>
+          <a:p>
+            <a:pPr algn="ctr"/>
           </a:p>
         </p:txBody>
       </p:sp>
@@ -5709,8 +5169,8 @@
         </p:nvSpPr>
         <p:spPr>
           <a:xfrm>
-            <a:off x="457200" y="6446520"/>
-            <a:ext cx="11277295" cy="320040"/>
+            <a:off x="914400" y="1280160"/>
+            <a:ext cx="10332720" cy="1188720"/>
           </a:xfrm>
           <a:prstGeom prst="rect">
             <a:avLst/>
@@ -5718,21 +5178,201 @@
           <a:noFill/>
         </p:spPr>
         <p:txBody>
-          <a:bodyPr wrap="none">
+          <a:bodyPr wrap="square" anchor="t">
             <a:spAutoFit/>
           </a:bodyPr>
           <a:lstStyle/>
           <a:p>
-            <a:pPr algn="r">
-              <a:defRPr sz="1000">
-                <a:solidFill>
-                  <a:srgbClr val="616161"/>
+            <a:pPr algn="l">
+              <a:defRPr sz="6400" b="1">
+                <a:solidFill>
+                  <a:srgbClr val="FFFFFF"/>
                 </a:solidFill>
                 <a:latin typeface="Segoe UI"/>
               </a:defRPr>
             </a:pPr>
             <a:r>
-              <a:t>Day Reminders v1.4.6</a:t>
+              <a:t>Try it now.</a:t>
+            </a:r>
+          </a:p>
+        </p:txBody>
+      </p:sp>
+      <p:sp>
+        <p:nvSpPr>
+          <p:cNvPr id="5" name="TextBox 4"/>
+          <p:cNvSpPr txBox="1"/>
+          <p:nvPr/>
+        </p:nvSpPr>
+        <p:spPr>
+          <a:xfrm>
+            <a:off x="914400" y="2606040"/>
+            <a:ext cx="10332720" cy="640080"/>
+          </a:xfrm>
+          <a:prstGeom prst="rect">
+            <a:avLst/>
+          </a:prstGeom>
+          <a:noFill/>
+        </p:spPr>
+        <p:txBody>
+          <a:bodyPr wrap="square" anchor="t">
+            <a:spAutoFit/>
+          </a:bodyPr>
+          <a:lstStyle/>
+          <a:p>
+            <a:pPr algn="l">
+              <a:defRPr sz="2600" b="0">
+                <a:solidFill>
+                  <a:srgbClr val="38AEEB"/>
+                </a:solidFill>
+                <a:latin typeface="Segoe UI"/>
+              </a:defRPr>
+            </a:pPr>
+            <a:r>
+              <a:t>Alarm-clock icon in your Teams left rail.</a:t>
+            </a:r>
+          </a:p>
+        </p:txBody>
+      </p:sp>
+      <p:sp>
+        <p:nvSpPr>
+          <p:cNvPr id="6" name="TextBox 5"/>
+          <p:cNvSpPr txBox="1"/>
+          <p:nvPr/>
+        </p:nvSpPr>
+        <p:spPr>
+          <a:xfrm>
+            <a:off x="914400" y="3840480"/>
+            <a:ext cx="10332720" cy="365760"/>
+          </a:xfrm>
+          <a:prstGeom prst="rect">
+            <a:avLst/>
+          </a:prstGeom>
+          <a:noFill/>
+        </p:spPr>
+        <p:txBody>
+          <a:bodyPr wrap="square" anchor="t">
+            <a:spAutoFit/>
+          </a:bodyPr>
+          <a:lstStyle/>
+          <a:p>
+            <a:pPr algn="l">
+              <a:defRPr sz="1300" b="1">
+                <a:solidFill>
+                  <a:srgbClr val="B0C8DC"/>
+                </a:solidFill>
+                <a:latin typeface="Segoe UI"/>
+              </a:defRPr>
+            </a:pPr>
+            <a:r>
+              <a:t>COMING NEXT</a:t>
+            </a:r>
+          </a:p>
+        </p:txBody>
+      </p:sp>
+      <p:sp>
+        <p:nvSpPr>
+          <p:cNvPr id="7" name="TextBox 6"/>
+          <p:cNvSpPr txBox="1"/>
+          <p:nvPr/>
+        </p:nvSpPr>
+        <p:spPr>
+          <a:xfrm>
+            <a:off x="914400" y="4206240"/>
+            <a:ext cx="10332720" cy="640080"/>
+          </a:xfrm>
+          <a:prstGeom prst="rect">
+            <a:avLst/>
+          </a:prstGeom>
+          <a:noFill/>
+        </p:spPr>
+        <p:txBody>
+          <a:bodyPr wrap="square" anchor="t">
+            <a:spAutoFit/>
+          </a:bodyPr>
+          <a:lstStyle/>
+          <a:p>
+            <a:pPr algn="l">
+              <a:defRPr sz="3000" b="1">
+                <a:solidFill>
+                  <a:srgbClr val="FFFFFF"/>
+                </a:solidFill>
+                <a:latin typeface="Segoe UI"/>
+              </a:defRPr>
+            </a:pPr>
+            <a:r>
+              <a:t>v1.5  ·  Sharing.</a:t>
+            </a:r>
+          </a:p>
+        </p:txBody>
+      </p:sp>
+      <p:sp>
+        <p:nvSpPr>
+          <p:cNvPr id="8" name="TextBox 7"/>
+          <p:cNvSpPr txBox="1"/>
+          <p:nvPr/>
+        </p:nvSpPr>
+        <p:spPr>
+          <a:xfrm>
+            <a:off x="914400" y="4937760"/>
+            <a:ext cx="10332720" cy="914400"/>
+          </a:xfrm>
+          <a:prstGeom prst="rect">
+            <a:avLst/>
+          </a:prstGeom>
+          <a:noFill/>
+        </p:spPr>
+        <p:txBody>
+          <a:bodyPr wrap="square" anchor="t">
+            <a:spAutoFit/>
+          </a:bodyPr>
+          <a:lstStyle/>
+          <a:p>
+            <a:pPr algn="l">
+              <a:defRPr sz="1600" b="0">
+                <a:solidFill>
+                  <a:srgbClr val="B0C8DC"/>
+                </a:solidFill>
+                <a:latin typeface="Segoe UI"/>
+              </a:defRPr>
+            </a:pPr>
+            <a:r>
+              <a:t>Assign reminders to teammates. Set per-tag default share lists so #QC auto-shares with the QC team without picking recipients each time.</a:t>
+            </a:r>
+          </a:p>
+        </p:txBody>
+      </p:sp>
+      <p:sp>
+        <p:nvSpPr>
+          <p:cNvPr id="9" name="TextBox 8"/>
+          <p:cNvSpPr txBox="1"/>
+          <p:nvPr/>
+        </p:nvSpPr>
+        <p:spPr>
+          <a:xfrm>
+            <a:off x="914400" y="6126480"/>
+            <a:ext cx="10332720" cy="457200"/>
+          </a:xfrm>
+          <a:prstGeom prst="rect">
+            <a:avLst/>
+          </a:prstGeom>
+          <a:noFill/>
+        </p:spPr>
+        <p:txBody>
+          <a:bodyPr wrap="square" anchor="t">
+            <a:spAutoFit/>
+          </a:bodyPr>
+          <a:lstStyle/>
+          <a:p>
+            <a:pPr algn="l">
+              <a:defRPr sz="1400" b="0">
+                <a:solidFill>
+                  <a:srgbClr val="B0C8DC"/>
+                </a:solidFill>
+                <a:latin typeface="Segoe UI"/>
+              </a:defRPr>
+            </a:pPr>
+            <a:r>
+              <a:t>Bugs, requests, 'this is annoying' → ping Josh, or drop them in the team channel.</a:t>
             </a:r>
           </a:p>
         </p:txBody>
